--- a/oi-framework/nsf/NSF-Quantum-Algorithms-Challenge_Working-Session-Deck.pptx
+++ b/oi-framework/nsf/NSF-Quantum-Algorithms-Challenge_Working-Session-Deck.pptx
@@ -21,9 +21,11 @@
     <p:sldId id="269" r:id="rId15"/>
     <p:sldId id="270" r:id="rId16"/>
     <p:sldId id="271" r:id="rId17"/>
+    <p:sldId id="272" r:id="rId18"/>
+    <p:sldId id="273" r:id="rId19"/>
   </p:sldIdLst>
   <p:notesMasterIdLst>
-    <p:notesMasterId r:id="rId18"/>
+    <p:notesMasterId r:id="rId20"/>
   </p:notesMasterIdLst>
   <p:sldSz cx="12192000" cy="6858000"/>
   <p:notesSz cx="6858000" cy="12192000"/>
@@ -122,44 +124,50 @@
   <p:extLst>
     <p:ext uri="{521415D9-36F7-43E2-AB2F-B90AF26B5E84}">
       <p14:sectionLst xmlns:p14="http://schemas.microsoft.com/office/powerpoint/2010/main">
-        <p14:section name="Context" id="{0f2163fc-7910-1440-581b-65c342cbf7f3}">
+        <p14:section name="Context" id="{73d493e5-41e9-9648-1a69-b1349f6dd26e}">
           <p14:sldIdLst>
             <p14:sldId id="256"/>
             <p14:sldId id="257"/>
             <p14:sldId id="258"/>
           </p14:sldIdLst>
         </p14:section>
-        <p14:section name="Where we are" id="{112b2485-59a7-d004-26e4-553e4402c093}">
+        <p14:section name="Where we are" id="{9557cf70-15b8-7bed-433b-b7a6d799c922}">
           <p14:sldIdLst>
             <p14:sldId id="259"/>
             <p14:sldId id="260"/>
             <p14:sldId id="261"/>
           </p14:sldIdLst>
         </p14:section>
-        <p14:section name="Design decisions" id="{a3ea1799-5f18-4ced-accb-7bb912c8c8be}">
+        <p14:section name="Design decisions" id="{07b49d29-8dae-bd82-e8ba-0587925d1519}">
           <p14:sldIdLst>
             <p14:sldId id="262"/>
             <p14:sldId id="263"/>
             <p14:sldId id="264"/>
           </p14:sldIdLst>
         </p14:section>
-        <p14:section name="Mobilize to adopt" id="{b7deb445-a104-5147-bccf-dc5606611dc5}">
+        <p14:section name="Mobilize to adopt" id="{a4ed0627-6652-3da4-09a6-0e01cf8f71fa}">
           <p14:sldIdLst>
             <p14:sldId id="265"/>
             <p14:sldId id="266"/>
             <p14:sldId id="267"/>
           </p14:sldIdLst>
         </p14:section>
-        <p14:section name="Asks and next steps" id="{67b0cd75-9486-fd0a-25e4-bca36bc45ab1}">
+        <p14:section name="Logic and risks" id="{935b63f8-d576-869c-9d2d-25bf307fa79c}">
           <p14:sldIdLst>
             <p14:sldId id="268"/>
             <p14:sldId id="269"/>
-            <p14:sldId id="270"/>
           </p14:sldIdLst>
         </p14:section>
-        <p14:section name="Appendix" id="{e6763d2c-b06e-2cf6-4a30-66b229933882}">
+        <p14:section name="Asks and next steps" id="{2edc936d-5b01-ab10-7011-06b9a8e58fae}">
           <p14:sldIdLst>
+            <p14:sldId id="270"/>
             <p14:sldId id="271"/>
+            <p14:sldId id="272"/>
+          </p14:sldIdLst>
+        </p14:section>
+        <p14:section name="Appendix" id="{cd10b1ff-f786-93d5-62d2-4d158ffdefd7}">
+          <p14:sldIdLst>
+            <p14:sldId id="273"/>
           </p14:sldIdLst>
         </p14:section>
       </p14:sectionLst>
@@ -566,7 +574,7 @@
           <a:p>
             <a:r>
               <a:rPr lang="en-US" dirty="0"/>
-              <a:t>Goal of the session: leave with the inputs and decisions the competition needs before rules go to NSF review in November and launch in early December. The deck is built around those asks; slides 13–15 are the ones to land.</a:t>
+              <a:t>Goal of the session: leave with the inputs and decisions the competition needs before rules go to NSF review in November and launch in early December. The deck is built around those asks; slides 13–17 are the ones to land: the logframe shows where the theory is riskiest, and the asks retire those risks.</a:t>
             </a:r>
             <a:endParaRPr lang="en-US" dirty="0"/>
           </a:p>
@@ -918,7 +926,7 @@
           <a:p>
             <a:r>
               <a:rPr lang="en-US" dirty="0"/>
-              <a:t>Close the collaborator part of the session by confirming a named contact at each company for asks 1 and 2. Without those, the prize structure and the problem framing stay open past the rules deadline.</a:t>
+              <a:t>Don't walk every cell. Point to the right-hand column: that's where the risk is. Most of it sits in the jump from Phase 1 outputs to Phase 2 outcomes, and that's exactly what the collaborators control. Then move to the next slide.</a:t>
             </a:r>
             <a:endParaRPr lang="en-US" dirty="0"/>
           </a:p>
@@ -1094,7 +1102,7 @@
           <a:p>
             <a:r>
               <a:rPr lang="en-US" dirty="0"/>
-              <a:t/>
+              <a:t>Close the collaborator part of the session by confirming a named contact at each company for asks 1 and 2. Without those, the prize structure and the problem framing stay open past the rules deadline.</a:t>
             </a:r>
             <a:endParaRPr lang="en-US" dirty="0"/>
           </a:p>
@@ -1206,6 +1214,182 @@
             <a:fld id="{F7021451-1387-4CA6-816F-3879F97B5CBC}" type="slidenum">
               <a:rPr lang="en-US"/>
               <a:t>16</a:t>
+            </a:fld>
+            <a:endParaRPr lang="en-US"/>
+          </a:p>
+        </p:txBody>
+      </p:sp>
+    </p:spTree>
+    <p:extLst>
+      <p:ext uri="{BB962C8B-B14F-4D97-AF65-F5344CB8AC3E}">
+        <p14:creationId xmlns:p14="http://schemas.microsoft.com/office/powerpoint/2010/main" val="1024086991"/>
+      </p:ext>
+    </p:extLst>
+  </p:cSld>
+  <p:clrMapOvr>
+    <a:masterClrMapping/>
+  </p:clrMapOvr>
+</p:notes>
+</file>
+
+<file path=ppt/notesSlides/notesSlide17.xml><?xml version="1.0" encoding="utf-8"?>
+<p:notes xmlns:a="http://schemas.openxmlformats.org/drawingml/2006/main" xmlns:r="http://schemas.openxmlformats.org/officeDocument/2006/relationships" xmlns:p="http://schemas.openxmlformats.org/presentationml/2006/main">
+  <p:cSld>
+    <p:spTree>
+      <p:nvGrpSpPr>
+        <p:cNvPr id="1" name=""/>
+        <p:cNvGrpSpPr/>
+        <p:nvPr/>
+      </p:nvGrpSpPr>
+      <p:grpSpPr>
+        <a:xfrm>
+          <a:off x="0" y="0"/>
+          <a:ext cx="0" cy="0"/>
+          <a:chOff x="0" y="0"/>
+          <a:chExt cx="0" cy="0"/>
+        </a:xfrm>
+      </p:grpSpPr>
+      <p:sp>
+        <p:nvSpPr>
+          <p:cNvPr id="2" name="Slide Image Placeholder 1"/>
+          <p:cNvSpPr>
+            <a:spLocks noGrp="1" noRot="1" noChangeAspect="1"/>
+          </p:cNvSpPr>
+          <p:nvPr>
+            <p:ph type="sldImg"/>
+          </p:nvPr>
+        </p:nvSpPr>
+        <p:spPr/>
+      </p:sp>
+      <p:sp>
+        <p:nvSpPr>
+          <p:cNvPr id="3" name="Notes Placeholder 2"/>
+          <p:cNvSpPr>
+            <a:spLocks noGrp="1"/>
+          </p:cNvSpPr>
+          <p:nvPr>
+            <p:ph type="body" idx="1"/>
+          </p:nvPr>
+        </p:nvSpPr>
+        <p:spPr/>
+        <p:txBody>
+          <a:bodyPr/>
+          <a:lstStyle/>
+          <a:p>
+            <a:r>
+              <a:rPr lang="en-US" dirty="0"/>
+              <a:t/>
+            </a:r>
+            <a:endParaRPr lang="en-US" dirty="0"/>
+          </a:p>
+        </p:txBody>
+      </p:sp>
+      <p:sp>
+        <p:nvSpPr>
+          <p:cNvPr id="4" name="Slide Number Placeholder 3"/>
+          <p:cNvSpPr>
+            <a:spLocks noGrp="1"/>
+          </p:cNvSpPr>
+          <p:nvPr>
+            <p:ph type="sldNum" sz="quarter" idx="10"/>
+          </p:nvPr>
+        </p:nvSpPr>
+        <p:spPr/>
+        <p:txBody>
+          <a:bodyPr/>
+          <a:lstStyle/>
+          <a:p>
+            <a:fld id="{F7021451-1387-4CA6-816F-3879F97B5CBC}" type="slidenum">
+              <a:rPr lang="en-US"/>
+              <a:t>17</a:t>
+            </a:fld>
+            <a:endParaRPr lang="en-US"/>
+          </a:p>
+        </p:txBody>
+      </p:sp>
+    </p:spTree>
+    <p:extLst>
+      <p:ext uri="{BB962C8B-B14F-4D97-AF65-F5344CB8AC3E}">
+        <p14:creationId xmlns:p14="http://schemas.microsoft.com/office/powerpoint/2010/main" val="1024086991"/>
+      </p:ext>
+    </p:extLst>
+  </p:cSld>
+  <p:clrMapOvr>
+    <a:masterClrMapping/>
+  </p:clrMapOvr>
+</p:notes>
+</file>
+
+<file path=ppt/notesSlides/notesSlide18.xml><?xml version="1.0" encoding="utf-8"?>
+<p:notes xmlns:a="http://schemas.openxmlformats.org/drawingml/2006/main" xmlns:r="http://schemas.openxmlformats.org/officeDocument/2006/relationships" xmlns:p="http://schemas.openxmlformats.org/presentationml/2006/main">
+  <p:cSld>
+    <p:spTree>
+      <p:nvGrpSpPr>
+        <p:cNvPr id="1" name=""/>
+        <p:cNvGrpSpPr/>
+        <p:nvPr/>
+      </p:nvGrpSpPr>
+      <p:grpSpPr>
+        <a:xfrm>
+          <a:off x="0" y="0"/>
+          <a:ext cx="0" cy="0"/>
+          <a:chOff x="0" y="0"/>
+          <a:chExt cx="0" cy="0"/>
+        </a:xfrm>
+      </p:grpSpPr>
+      <p:sp>
+        <p:nvSpPr>
+          <p:cNvPr id="2" name="Slide Image Placeholder 1"/>
+          <p:cNvSpPr>
+            <a:spLocks noGrp="1" noRot="1" noChangeAspect="1"/>
+          </p:cNvSpPr>
+          <p:nvPr>
+            <p:ph type="sldImg"/>
+          </p:nvPr>
+        </p:nvSpPr>
+        <p:spPr/>
+      </p:sp>
+      <p:sp>
+        <p:nvSpPr>
+          <p:cNvPr id="3" name="Notes Placeholder 2"/>
+          <p:cNvSpPr>
+            <a:spLocks noGrp="1"/>
+          </p:cNvSpPr>
+          <p:nvPr>
+            <p:ph type="body" idx="1"/>
+          </p:nvPr>
+        </p:nvSpPr>
+        <p:spPr/>
+        <p:txBody>
+          <a:bodyPr/>
+          <a:lstStyle/>
+          <a:p>
+            <a:r>
+              <a:rPr lang="en-US" dirty="0"/>
+              <a:t/>
+            </a:r>
+            <a:endParaRPr lang="en-US" dirty="0"/>
+          </a:p>
+        </p:txBody>
+      </p:sp>
+      <p:sp>
+        <p:nvSpPr>
+          <p:cNvPr id="4" name="Slide Number Placeholder 3"/>
+          <p:cNvSpPr>
+            <a:spLocks noGrp="1"/>
+          </p:cNvSpPr>
+          <p:nvPr>
+            <p:ph type="sldNum" sz="quarter" idx="10"/>
+          </p:nvPr>
+        </p:nvSpPr>
+        <p:spPr/>
+        <p:txBody>
+          <a:bodyPr/>
+          <a:lstStyle/>
+          <a:p>
+            <a:fld id="{F7021451-1387-4CA6-816F-3879F97B5CBC}" type="slidenum">
+              <a:rPr lang="en-US"/>
+              <a:t>18</a:t>
             </a:fld>
             <a:endParaRPr lang="en-US"/>
           </a:p>
@@ -5493,7 +5677,7 @@
                 <a:ea typeface="Cambria" pitchFamily="34" charset="-122"/>
                 <a:cs typeface="Cambria" pitchFamily="34" charset="-120"/>
               </a:rPr>
-              <a:t>What we ask of the industry collaborators</a:t>
+              <a:t>Logframe: the challenge's theory of change, and where its assumptions are weakest</a:t>
             </a:r>
             <a:endParaRPr lang="en-US" sz="2800" dirty="0"/>
           </a:p>
@@ -5502,6 +5686,4331 @@
       <p:graphicFrame>
         <p:nvGraphicFramePr>
           <p:cNvPr id="14" name="Table 0"/>
+          <p:cNvGraphicFramePr>
+            <a:graphicFrameLocks noGrp="1"/>
+          </p:cNvGraphicFramePr>
+          <p:nvPr>
+            <p:extLst>
+              <p:ext uri="{D42A27DB-BD31-4B8C-83A1-F6EECF244321}">
+                <p14:modId xmlns:p14="http://schemas.microsoft.com/office/powerpoint/2010/main" val="1579011935"/>
+              </p:ext>
+            </p:extLst>
+          </p:nvPr>
+        </p:nvGraphicFramePr>
+        <p:xfrm>
+          <a:off x="548640" y="1371600"/>
+          <a:ext cx="11064240" cy="914400"/>
+        </p:xfrm>
+        <a:graphic>
+          <a:graphicData uri="http://schemas.openxmlformats.org/drawingml/2006/table">
+            <a:tbl>
+              <a:tblPr/>
+              <a:tblGrid>
+                <a:gridCol w="1325880"/>
+                <a:gridCol w="2606040"/>
+                <a:gridCol w="2240280"/>
+                <a:gridCol w="2011680"/>
+                <a:gridCol w="2880360"/>
+              </a:tblGrid>
+              <a:tr h="0">
+                <a:tc>
+                  <a:txBody>
+                    <a:bodyPr/>
+                    <a:lstStyle/>
+                    <a:p>
+                      <a:pPr indent="0" marL="0">
+                        <a:buNone/>
+                      </a:pPr>
+                      <a:r>
+                        <a:rPr lang="en-US" sz="1250" b="1" dirty="0">
+                          <a:solidFill>
+                            <a:schemeClr val="bg1"/>
+                          </a:solidFill>
+                        </a:rPr>
+                        <a:t>Level</a:t>
+                      </a:r>
+                      <a:endParaRPr lang="en-US" sz="1250" dirty="0"/>
+                    </a:p>
+                  </a:txBody>
+                  <a:tcPr marL="76200" marR="76200" marT="50800" marB="50800" anchor="ctr">
+                    <a:lnL w="6350" cap="flat" cmpd="sng" algn="ctr">
+                      <a:solidFill>
+                        <a:srgbClr val="BFE0D8"/>
+                      </a:solidFill>
+                      <a:prstDash val="solid"/>
+                      <a:round/>
+                      <a:headEnd type="none" w="med" len="med"/>
+                      <a:tailEnd type="none" w="med" len="med"/>
+                    </a:lnL>
+                    <a:lnR w="6350" cap="flat" cmpd="sng" algn="ctr">
+                      <a:solidFill>
+                        <a:srgbClr val="BFE0D8"/>
+                      </a:solidFill>
+                      <a:prstDash val="solid"/>
+                      <a:round/>
+                      <a:headEnd type="none" w="med" len="med"/>
+                      <a:tailEnd type="none" w="med" len="med"/>
+                    </a:lnR>
+                    <a:lnT w="6350" cap="flat" cmpd="sng" algn="ctr">
+                      <a:solidFill>
+                        <a:srgbClr val="BFE0D8"/>
+                      </a:solidFill>
+                      <a:prstDash val="solid"/>
+                      <a:round/>
+                      <a:headEnd type="none" w="med" len="med"/>
+                      <a:tailEnd type="none" w="med" len="med"/>
+                    </a:lnT>
+                    <a:lnB w="6350" cap="flat" cmpd="sng" algn="ctr">
+                      <a:solidFill>
+                        <a:srgbClr val="BFE0D8"/>
+                      </a:solidFill>
+                      <a:prstDash val="solid"/>
+                      <a:round/>
+                      <a:headEnd type="none" w="med" len="med"/>
+                      <a:tailEnd type="none" w="med" len="med"/>
+                    </a:lnB>
+                    <a:solidFill>
+                      <a:schemeClr val="tx2"/>
+                    </a:solidFill>
+                  </a:tcPr>
+                </a:tc>
+                <a:tc>
+                  <a:txBody>
+                    <a:bodyPr/>
+                    <a:lstStyle/>
+                    <a:p>
+                      <a:pPr indent="0" marL="0">
+                        <a:buNone/>
+                      </a:pPr>
+                      <a:r>
+                        <a:rPr lang="en-US" sz="1250" b="1" dirty="0">
+                          <a:solidFill>
+                            <a:schemeClr val="bg1"/>
+                          </a:solidFill>
+                        </a:rPr>
+                        <a:t>What we aim for</a:t>
+                      </a:r>
+                      <a:endParaRPr lang="en-US" sz="1250" dirty="0"/>
+                    </a:p>
+                  </a:txBody>
+                  <a:tcPr marL="76200" marR="76200" marT="50800" marB="50800" anchor="ctr">
+                    <a:lnL w="6350" cap="flat" cmpd="sng" algn="ctr">
+                      <a:solidFill>
+                        <a:srgbClr val="BFE0D8"/>
+                      </a:solidFill>
+                      <a:prstDash val="solid"/>
+                      <a:round/>
+                      <a:headEnd type="none" w="med" len="med"/>
+                      <a:tailEnd type="none" w="med" len="med"/>
+                    </a:lnL>
+                    <a:lnR w="6350" cap="flat" cmpd="sng" algn="ctr">
+                      <a:solidFill>
+                        <a:srgbClr val="BFE0D8"/>
+                      </a:solidFill>
+                      <a:prstDash val="solid"/>
+                      <a:round/>
+                      <a:headEnd type="none" w="med" len="med"/>
+                      <a:tailEnd type="none" w="med" len="med"/>
+                    </a:lnR>
+                    <a:lnT w="6350" cap="flat" cmpd="sng" algn="ctr">
+                      <a:solidFill>
+                        <a:srgbClr val="BFE0D8"/>
+                      </a:solidFill>
+                      <a:prstDash val="solid"/>
+                      <a:round/>
+                      <a:headEnd type="none" w="med" len="med"/>
+                      <a:tailEnd type="none" w="med" len="med"/>
+                    </a:lnT>
+                    <a:lnB w="6350" cap="flat" cmpd="sng" algn="ctr">
+                      <a:solidFill>
+                        <a:srgbClr val="BFE0D8"/>
+                      </a:solidFill>
+                      <a:prstDash val="solid"/>
+                      <a:round/>
+                      <a:headEnd type="none" w="med" len="med"/>
+                      <a:tailEnd type="none" w="med" len="med"/>
+                    </a:lnB>
+                    <a:solidFill>
+                      <a:schemeClr val="tx2"/>
+                    </a:solidFill>
+                  </a:tcPr>
+                </a:tc>
+                <a:tc>
+                  <a:txBody>
+                    <a:bodyPr/>
+                    <a:lstStyle/>
+                    <a:p>
+                      <a:pPr indent="0" marL="0">
+                        <a:buNone/>
+                      </a:pPr>
+                      <a:r>
+                        <a:rPr lang="en-US" sz="1250" b="1" dirty="0">
+                          <a:solidFill>
+                            <a:schemeClr val="bg1"/>
+                          </a:solidFill>
+                        </a:rPr>
+                        <a:t>Indicators</a:t>
+                      </a:r>
+                      <a:endParaRPr lang="en-US" sz="1250" dirty="0"/>
+                    </a:p>
+                  </a:txBody>
+                  <a:tcPr marL="76200" marR="76200" marT="50800" marB="50800" anchor="ctr">
+                    <a:lnL w="6350" cap="flat" cmpd="sng" algn="ctr">
+                      <a:solidFill>
+                        <a:srgbClr val="BFE0D8"/>
+                      </a:solidFill>
+                      <a:prstDash val="solid"/>
+                      <a:round/>
+                      <a:headEnd type="none" w="med" len="med"/>
+                      <a:tailEnd type="none" w="med" len="med"/>
+                    </a:lnL>
+                    <a:lnR w="6350" cap="flat" cmpd="sng" algn="ctr">
+                      <a:solidFill>
+                        <a:srgbClr val="BFE0D8"/>
+                      </a:solidFill>
+                      <a:prstDash val="solid"/>
+                      <a:round/>
+                      <a:headEnd type="none" w="med" len="med"/>
+                      <a:tailEnd type="none" w="med" len="med"/>
+                    </a:lnR>
+                    <a:lnT w="6350" cap="flat" cmpd="sng" algn="ctr">
+                      <a:solidFill>
+                        <a:srgbClr val="BFE0D8"/>
+                      </a:solidFill>
+                      <a:prstDash val="solid"/>
+                      <a:round/>
+                      <a:headEnd type="none" w="med" len="med"/>
+                      <a:tailEnd type="none" w="med" len="med"/>
+                    </a:lnT>
+                    <a:lnB w="6350" cap="flat" cmpd="sng" algn="ctr">
+                      <a:solidFill>
+                        <a:srgbClr val="BFE0D8"/>
+                      </a:solidFill>
+                      <a:prstDash val="solid"/>
+                      <a:round/>
+                      <a:headEnd type="none" w="med" len="med"/>
+                      <a:tailEnd type="none" w="med" len="med"/>
+                    </a:lnB>
+                    <a:solidFill>
+                      <a:schemeClr val="tx2"/>
+                    </a:solidFill>
+                  </a:tcPr>
+                </a:tc>
+                <a:tc>
+                  <a:txBody>
+                    <a:bodyPr/>
+                    <a:lstStyle/>
+                    <a:p>
+                      <a:pPr indent="0" marL="0">
+                        <a:buNone/>
+                      </a:pPr>
+                      <a:r>
+                        <a:rPr lang="en-US" sz="1250" b="1" dirty="0">
+                          <a:solidFill>
+                            <a:schemeClr val="bg1"/>
+                          </a:solidFill>
+                        </a:rPr>
+                        <a:t>How we'll know</a:t>
+                      </a:r>
+                      <a:endParaRPr lang="en-US" sz="1250" dirty="0"/>
+                    </a:p>
+                  </a:txBody>
+                  <a:tcPr marL="76200" marR="76200" marT="50800" marB="50800" anchor="ctr">
+                    <a:lnL w="6350" cap="flat" cmpd="sng" algn="ctr">
+                      <a:solidFill>
+                        <a:srgbClr val="BFE0D8"/>
+                      </a:solidFill>
+                      <a:prstDash val="solid"/>
+                      <a:round/>
+                      <a:headEnd type="none" w="med" len="med"/>
+                      <a:tailEnd type="none" w="med" len="med"/>
+                    </a:lnL>
+                    <a:lnR w="6350" cap="flat" cmpd="sng" algn="ctr">
+                      <a:solidFill>
+                        <a:srgbClr val="BFE0D8"/>
+                      </a:solidFill>
+                      <a:prstDash val="solid"/>
+                      <a:round/>
+                      <a:headEnd type="none" w="med" len="med"/>
+                      <a:tailEnd type="none" w="med" len="med"/>
+                    </a:lnR>
+                    <a:lnT w="6350" cap="flat" cmpd="sng" algn="ctr">
+                      <a:solidFill>
+                        <a:srgbClr val="BFE0D8"/>
+                      </a:solidFill>
+                      <a:prstDash val="solid"/>
+                      <a:round/>
+                      <a:headEnd type="none" w="med" len="med"/>
+                      <a:tailEnd type="none" w="med" len="med"/>
+                    </a:lnT>
+                    <a:lnB w="6350" cap="flat" cmpd="sng" algn="ctr">
+                      <a:solidFill>
+                        <a:srgbClr val="BFE0D8"/>
+                      </a:solidFill>
+                      <a:prstDash val="solid"/>
+                      <a:round/>
+                      <a:headEnd type="none" w="med" len="med"/>
+                      <a:tailEnd type="none" w="med" len="med"/>
+                    </a:lnB>
+                    <a:solidFill>
+                      <a:schemeClr val="tx2"/>
+                    </a:solidFill>
+                  </a:tcPr>
+                </a:tc>
+                <a:tc>
+                  <a:txBody>
+                    <a:bodyPr/>
+                    <a:lstStyle/>
+                    <a:p>
+                      <a:pPr indent="0" marL="0">
+                        <a:buNone/>
+                      </a:pPr>
+                      <a:r>
+                        <a:rPr lang="en-US" sz="1250" b="1" dirty="0">
+                          <a:solidFill>
+                            <a:schemeClr val="bg1"/>
+                          </a:solidFill>
+                        </a:rPr>
+                        <a:t>Assumptions needed to reach the level above</a:t>
+                      </a:r>
+                      <a:endParaRPr lang="en-US" sz="1250" dirty="0"/>
+                    </a:p>
+                  </a:txBody>
+                  <a:tcPr marL="76200" marR="76200" marT="50800" marB="50800" anchor="ctr">
+                    <a:lnL w="6350" cap="flat" cmpd="sng" algn="ctr">
+                      <a:solidFill>
+                        <a:srgbClr val="BFE0D8"/>
+                      </a:solidFill>
+                      <a:prstDash val="solid"/>
+                      <a:round/>
+                      <a:headEnd type="none" w="med" len="med"/>
+                      <a:tailEnd type="none" w="med" len="med"/>
+                    </a:lnL>
+                    <a:lnR w="6350" cap="flat" cmpd="sng" algn="ctr">
+                      <a:solidFill>
+                        <a:srgbClr val="BFE0D8"/>
+                      </a:solidFill>
+                      <a:prstDash val="solid"/>
+                      <a:round/>
+                      <a:headEnd type="none" w="med" len="med"/>
+                      <a:tailEnd type="none" w="med" len="med"/>
+                    </a:lnR>
+                    <a:lnT w="6350" cap="flat" cmpd="sng" algn="ctr">
+                      <a:solidFill>
+                        <a:srgbClr val="BFE0D8"/>
+                      </a:solidFill>
+                      <a:prstDash val="solid"/>
+                      <a:round/>
+                      <a:headEnd type="none" w="med" len="med"/>
+                      <a:tailEnd type="none" w="med" len="med"/>
+                    </a:lnT>
+                    <a:lnB w="6350" cap="flat" cmpd="sng" algn="ctr">
+                      <a:solidFill>
+                        <a:srgbClr val="BFE0D8"/>
+                      </a:solidFill>
+                      <a:prstDash val="solid"/>
+                      <a:round/>
+                      <a:headEnd type="none" w="med" len="med"/>
+                      <a:tailEnd type="none" w="med" len="med"/>
+                    </a:lnB>
+                    <a:solidFill>
+                      <a:schemeClr val="tx2"/>
+                    </a:solidFill>
+                  </a:tcPr>
+                </a:tc>
+              </a:tr>
+              <a:tr h="0">
+                <a:tc>
+                  <a:txBody>
+                    <a:bodyPr/>
+                    <a:lstStyle/>
+                    <a:p>
+                      <a:pPr indent="0" marL="0">
+                        <a:buNone/>
+                      </a:pPr>
+                      <a:r>
+                        <a:rPr lang="en-US" sz="1250" b="1" dirty="0">
+                          <a:solidFill>
+                            <a:schemeClr val="tx2"/>
+                          </a:solidFill>
+                        </a:rPr>
+                        <a:t>Goal</a:t>
+                      </a:r>
+                      <a:endParaRPr lang="en-US" sz="1250" dirty="0"/>
+                    </a:p>
+                    <a:p>
+                      <a:pPr indent="0" marL="0">
+                        <a:buNone/>
+                      </a:pPr>
+                      <a:r>
+                        <a:rPr lang="en-US" sz="1250" i="1" dirty="0">
+                          <a:solidFill>
+                            <a:schemeClr val="accent5"/>
+                          </a:solidFill>
+                        </a:rPr>
+                        <a:t>Project Triad</a:t>
+                      </a:r>
+                      <a:endParaRPr lang="en-US" sz="1250" dirty="0"/>
+                    </a:p>
+                  </a:txBody>
+                  <a:tcPr marL="76200" marR="76200" marT="50800" marB="50800" anchor="t">
+                    <a:lnL w="6350" cap="flat" cmpd="sng" algn="ctr">
+                      <a:solidFill>
+                        <a:srgbClr val="BFE0D8"/>
+                      </a:solidFill>
+                      <a:prstDash val="solid"/>
+                      <a:round/>
+                      <a:headEnd type="none" w="med" len="med"/>
+                      <a:tailEnd type="none" w="med" len="med"/>
+                    </a:lnL>
+                    <a:lnR w="6350" cap="flat" cmpd="sng" algn="ctr">
+                      <a:solidFill>
+                        <a:srgbClr val="BFE0D8"/>
+                      </a:solidFill>
+                      <a:prstDash val="solid"/>
+                      <a:round/>
+                      <a:headEnd type="none" w="med" len="med"/>
+                      <a:tailEnd type="none" w="med" len="med"/>
+                    </a:lnR>
+                    <a:lnT w="6350" cap="flat" cmpd="sng" algn="ctr">
+                      <a:solidFill>
+                        <a:srgbClr val="BFE0D8"/>
+                      </a:solidFill>
+                      <a:prstDash val="solid"/>
+                      <a:round/>
+                      <a:headEnd type="none" w="med" len="med"/>
+                      <a:tailEnd type="none" w="med" len="med"/>
+                    </a:lnT>
+                    <a:lnB w="6350" cap="flat" cmpd="sng" algn="ctr">
+                      <a:solidFill>
+                        <a:srgbClr val="BFE0D8"/>
+                      </a:solidFill>
+                      <a:prstDash val="solid"/>
+                      <a:round/>
+                      <a:headEnd type="none" w="med" len="med"/>
+                      <a:tailEnd type="none" w="med" len="med"/>
+                    </a:lnB>
+                    <a:solidFill>
+                      <a:schemeClr val="bg1"/>
+                    </a:solidFill>
+                  </a:tcPr>
+                </a:tc>
+                <a:tc>
+                  <a:txBody>
+                    <a:bodyPr/>
+                    <a:lstStyle/>
+                    <a:p>
+                      <a:pPr indent="0" marL="0">
+                        <a:buNone/>
+                      </a:pPr>
+                      <a:r>
+                        <a:rPr lang="en-US" sz="1250" dirty="0">
+                          <a:solidFill>
+                            <a:schemeClr val="tx1"/>
+                          </a:solidFill>
+                        </a:rPr>
+                        <a:t>Quantum technology moves from the lab into real-world use in U.S. industry</a:t>
+                      </a:r>
+                      <a:endParaRPr lang="en-US" sz="1250" dirty="0"/>
+                    </a:p>
+                  </a:txBody>
+                  <a:tcPr marL="76200" marR="76200" marT="50800" marB="50800" anchor="t">
+                    <a:lnL w="6350" cap="flat" cmpd="sng" algn="ctr">
+                      <a:solidFill>
+                        <a:srgbClr val="BFE0D8"/>
+                      </a:solidFill>
+                      <a:prstDash val="solid"/>
+                      <a:round/>
+                      <a:headEnd type="none" w="med" len="med"/>
+                      <a:tailEnd type="none" w="med" len="med"/>
+                    </a:lnL>
+                    <a:lnR w="6350" cap="flat" cmpd="sng" algn="ctr">
+                      <a:solidFill>
+                        <a:srgbClr val="BFE0D8"/>
+                      </a:solidFill>
+                      <a:prstDash val="solid"/>
+                      <a:round/>
+                      <a:headEnd type="none" w="med" len="med"/>
+                      <a:tailEnd type="none" w="med" len="med"/>
+                    </a:lnR>
+                    <a:lnT w="6350" cap="flat" cmpd="sng" algn="ctr">
+                      <a:solidFill>
+                        <a:srgbClr val="BFE0D8"/>
+                      </a:solidFill>
+                      <a:prstDash val="solid"/>
+                      <a:round/>
+                      <a:headEnd type="none" w="med" len="med"/>
+                      <a:tailEnd type="none" w="med" len="med"/>
+                    </a:lnT>
+                    <a:lnB w="6350" cap="flat" cmpd="sng" algn="ctr">
+                      <a:solidFill>
+                        <a:srgbClr val="BFE0D8"/>
+                      </a:solidFill>
+                      <a:prstDash val="solid"/>
+                      <a:round/>
+                      <a:headEnd type="none" w="med" len="med"/>
+                      <a:tailEnd type="none" w="med" len="med"/>
+                    </a:lnB>
+                    <a:solidFill>
+                      <a:schemeClr val="bg1"/>
+                    </a:solidFill>
+                  </a:tcPr>
+                </a:tc>
+                <a:tc>
+                  <a:txBody>
+                    <a:bodyPr/>
+                    <a:lstStyle/>
+                    <a:p>
+                      <a:pPr indent="0" marL="0">
+                        <a:buNone/>
+                      </a:pPr>
+                      <a:r>
+                        <a:rPr lang="en-US" sz="1250" dirty="0">
+                          <a:solidFill>
+                            <a:schemeClr val="tx1"/>
+                          </a:solidFill>
+                        </a:rPr>
+                        <a:t>Solutions adopted commercially; follow-on funding and contracts</a:t>
+                      </a:r>
+                      <a:endParaRPr lang="en-US" sz="1250" dirty="0"/>
+                    </a:p>
+                  </a:txBody>
+                  <a:tcPr marL="76200" marR="76200" marT="50800" marB="50800" anchor="t">
+                    <a:lnL w="6350" cap="flat" cmpd="sng" algn="ctr">
+                      <a:solidFill>
+                        <a:srgbClr val="BFE0D8"/>
+                      </a:solidFill>
+                      <a:prstDash val="solid"/>
+                      <a:round/>
+                      <a:headEnd type="none" w="med" len="med"/>
+                      <a:tailEnd type="none" w="med" len="med"/>
+                    </a:lnL>
+                    <a:lnR w="6350" cap="flat" cmpd="sng" algn="ctr">
+                      <a:solidFill>
+                        <a:srgbClr val="BFE0D8"/>
+                      </a:solidFill>
+                      <a:prstDash val="solid"/>
+                      <a:round/>
+                      <a:headEnd type="none" w="med" len="med"/>
+                      <a:tailEnd type="none" w="med" len="med"/>
+                    </a:lnR>
+                    <a:lnT w="6350" cap="flat" cmpd="sng" algn="ctr">
+                      <a:solidFill>
+                        <a:srgbClr val="BFE0D8"/>
+                      </a:solidFill>
+                      <a:prstDash val="solid"/>
+                      <a:round/>
+                      <a:headEnd type="none" w="med" len="med"/>
+                      <a:tailEnd type="none" w="med" len="med"/>
+                    </a:lnT>
+                    <a:lnB w="6350" cap="flat" cmpd="sng" algn="ctr">
+                      <a:solidFill>
+                        <a:srgbClr val="BFE0D8"/>
+                      </a:solidFill>
+                      <a:prstDash val="solid"/>
+                      <a:round/>
+                      <a:headEnd type="none" w="med" len="med"/>
+                      <a:tailEnd type="none" w="med" len="med"/>
+                    </a:lnB>
+                    <a:solidFill>
+                      <a:schemeClr val="bg1"/>
+                    </a:solidFill>
+                  </a:tcPr>
+                </a:tc>
+                <a:tc>
+                  <a:txBody>
+                    <a:bodyPr/>
+                    <a:lstStyle/>
+                    <a:p>
+                      <a:pPr indent="0" marL="0">
+                        <a:buNone/>
+                      </a:pPr>
+                      <a:r>
+                        <a:rPr lang="en-US" sz="1250" dirty="0">
+                          <a:solidFill>
+                            <a:schemeClr val="tx1"/>
+                          </a:solidFill>
+                        </a:rPr>
+                        <a:t>NSF Quantum+X tracking; 12–36-month follow-up</a:t>
+                      </a:r>
+                      <a:endParaRPr lang="en-US" sz="1250" dirty="0"/>
+                    </a:p>
+                  </a:txBody>
+                  <a:tcPr marL="76200" marR="76200" marT="50800" marB="50800" anchor="t">
+                    <a:lnL w="6350" cap="flat" cmpd="sng" algn="ctr">
+                      <a:solidFill>
+                        <a:srgbClr val="BFE0D8"/>
+                      </a:solidFill>
+                      <a:prstDash val="solid"/>
+                      <a:round/>
+                      <a:headEnd type="none" w="med" len="med"/>
+                      <a:tailEnd type="none" w="med" len="med"/>
+                    </a:lnL>
+                    <a:lnR w="6350" cap="flat" cmpd="sng" algn="ctr">
+                      <a:solidFill>
+                        <a:srgbClr val="BFE0D8"/>
+                      </a:solidFill>
+                      <a:prstDash val="solid"/>
+                      <a:round/>
+                      <a:headEnd type="none" w="med" len="med"/>
+                      <a:tailEnd type="none" w="med" len="med"/>
+                    </a:lnR>
+                    <a:lnT w="6350" cap="flat" cmpd="sng" algn="ctr">
+                      <a:solidFill>
+                        <a:srgbClr val="BFE0D8"/>
+                      </a:solidFill>
+                      <a:prstDash val="solid"/>
+                      <a:round/>
+                      <a:headEnd type="none" w="med" len="med"/>
+                      <a:tailEnd type="none" w="med" len="med"/>
+                    </a:lnT>
+                    <a:lnB w="6350" cap="flat" cmpd="sng" algn="ctr">
+                      <a:solidFill>
+                        <a:srgbClr val="BFE0D8"/>
+                      </a:solidFill>
+                      <a:prstDash val="solid"/>
+                      <a:round/>
+                      <a:headEnd type="none" w="med" len="med"/>
+                      <a:tailEnd type="none" w="med" len="med"/>
+                    </a:lnB>
+                    <a:solidFill>
+                      <a:schemeClr val="bg1"/>
+                    </a:solidFill>
+                  </a:tcPr>
+                </a:tc>
+                <a:tc>
+                  <a:txBody>
+                    <a:bodyPr/>
+                    <a:lstStyle/>
+                    <a:p>
+                      <a:pPr indent="0" marL="0">
+                        <a:buNone/>
+                      </a:pPr>
+                      <a:r>
+                        <a:rPr lang="en-US" sz="1250" b="1" dirty="0">
+                          <a:solidFill>
+                            <a:schemeClr val="accent5"/>
+                          </a:solidFill>
+                        </a:rPr>
+                        <a:t>WATCH  </a:t>
+                      </a:r>
+                      <a:pPr indent="0" marL="0">
+                        <a:buNone/>
+                      </a:pPr>
+                      <a:r>
+                        <a:rPr lang="en-US" sz="1250" dirty="0">
+                          <a:solidFill>
+                            <a:schemeClr val="tx1"/>
+                          </a:solidFill>
+                        </a:rPr>
+                        <a:t>Quantum+X continues after this challenge, and later tracks reuse what it builds</a:t>
+                      </a:r>
+                      <a:endParaRPr lang="en-US" sz="1250" dirty="0"/>
+                    </a:p>
+                  </a:txBody>
+                  <a:tcPr marL="76200" marR="76200" marT="50800" marB="50800" anchor="t">
+                    <a:lnL w="6350" cap="flat" cmpd="sng" algn="ctr">
+                      <a:solidFill>
+                        <a:srgbClr val="BFE0D8"/>
+                      </a:solidFill>
+                      <a:prstDash val="solid"/>
+                      <a:round/>
+                      <a:headEnd type="none" w="med" len="med"/>
+                      <a:tailEnd type="none" w="med" len="med"/>
+                    </a:lnL>
+                    <a:lnR w="6350" cap="flat" cmpd="sng" algn="ctr">
+                      <a:solidFill>
+                        <a:srgbClr val="BFE0D8"/>
+                      </a:solidFill>
+                      <a:prstDash val="solid"/>
+                      <a:round/>
+                      <a:headEnd type="none" w="med" len="med"/>
+                      <a:tailEnd type="none" w="med" len="med"/>
+                    </a:lnR>
+                    <a:lnT w="6350" cap="flat" cmpd="sng" algn="ctr">
+                      <a:solidFill>
+                        <a:srgbClr val="BFE0D8"/>
+                      </a:solidFill>
+                      <a:prstDash val="solid"/>
+                      <a:round/>
+                      <a:headEnd type="none" w="med" len="med"/>
+                      <a:tailEnd type="none" w="med" len="med"/>
+                    </a:lnT>
+                    <a:lnB w="6350" cap="flat" cmpd="sng" algn="ctr">
+                      <a:solidFill>
+                        <a:srgbClr val="BFE0D8"/>
+                      </a:solidFill>
+                      <a:prstDash val="solid"/>
+                      <a:round/>
+                      <a:headEnd type="none" w="med" len="med"/>
+                      <a:tailEnd type="none" w="med" len="med"/>
+                    </a:lnB>
+                    <a:solidFill>
+                      <a:schemeClr val="bg1"/>
+                    </a:solidFill>
+                  </a:tcPr>
+                </a:tc>
+              </a:tr>
+              <a:tr h="0">
+                <a:tc>
+                  <a:txBody>
+                    <a:bodyPr/>
+                    <a:lstStyle/>
+                    <a:p>
+                      <a:pPr indent="0" marL="0">
+                        <a:buNone/>
+                      </a:pPr>
+                      <a:r>
+                        <a:rPr lang="en-US" sz="1250" b="1" dirty="0">
+                          <a:solidFill>
+                            <a:schemeClr val="tx2"/>
+                          </a:solidFill>
+                        </a:rPr>
+                        <a:t>Purpose</a:t>
+                      </a:r>
+                      <a:endParaRPr lang="en-US" sz="1250" dirty="0"/>
+                    </a:p>
+                    <a:p>
+                      <a:pPr indent="0" marL="0">
+                        <a:buNone/>
+                      </a:pPr>
+                      <a:r>
+                        <a:rPr lang="en-US" sz="1250" i="1" dirty="0">
+                          <a:solidFill>
+                            <a:schemeClr val="accent5"/>
+                          </a:solidFill>
+                        </a:rPr>
+                        <a:t>Phase 2 outcome</a:t>
+                      </a:r>
+                      <a:endParaRPr lang="en-US" sz="1250" dirty="0"/>
+                    </a:p>
+                  </a:txBody>
+                  <a:tcPr marL="76200" marR="76200" marT="50800" marB="50800" anchor="t">
+                    <a:lnL w="6350" cap="flat" cmpd="sng" algn="ctr">
+                      <a:solidFill>
+                        <a:srgbClr val="BFE0D8"/>
+                      </a:solidFill>
+                      <a:prstDash val="solid"/>
+                      <a:round/>
+                      <a:headEnd type="none" w="med" len="med"/>
+                      <a:tailEnd type="none" w="med" len="med"/>
+                    </a:lnL>
+                    <a:lnR w="6350" cap="flat" cmpd="sng" algn="ctr">
+                      <a:solidFill>
+                        <a:srgbClr val="BFE0D8"/>
+                      </a:solidFill>
+                      <a:prstDash val="solid"/>
+                      <a:round/>
+                      <a:headEnd type="none" w="med" len="med"/>
+                      <a:tailEnd type="none" w="med" len="med"/>
+                    </a:lnR>
+                    <a:lnT w="6350" cap="flat" cmpd="sng" algn="ctr">
+                      <a:solidFill>
+                        <a:srgbClr val="BFE0D8"/>
+                      </a:solidFill>
+                      <a:prstDash val="solid"/>
+                      <a:round/>
+                      <a:headEnd type="none" w="med" len="med"/>
+                      <a:tailEnd type="none" w="med" len="med"/>
+                    </a:lnT>
+                    <a:lnB w="6350" cap="flat" cmpd="sng" algn="ctr">
+                      <a:solidFill>
+                        <a:srgbClr val="BFE0D8"/>
+                      </a:solidFill>
+                      <a:prstDash val="solid"/>
+                      <a:round/>
+                      <a:headEnd type="none" w="med" len="med"/>
+                      <a:tailEnd type="none" w="med" len="med"/>
+                    </a:lnB>
+                    <a:solidFill>
+                      <a:schemeClr val="bg2"/>
+                    </a:solidFill>
+                  </a:tcPr>
+                </a:tc>
+                <a:tc>
+                  <a:txBody>
+                    <a:bodyPr/>
+                    <a:lstStyle/>
+                    <a:p>
+                      <a:pPr indent="0" marL="0">
+                        <a:buNone/>
+                      </a:pPr>
+                      <a:r>
+                        <a:rPr lang="en-US" sz="1250" dirty="0">
+                          <a:solidFill>
+                            <a:schemeClr val="tx1"/>
+                          </a:solidFill>
+                        </a:rPr>
+                        <a:t>Industry-paired teams validate quantum algorithms on real problems</a:t>
+                      </a:r>
+                      <a:endParaRPr lang="en-US" sz="1250" dirty="0"/>
+                    </a:p>
+                  </a:txBody>
+                  <a:tcPr marL="76200" marR="76200" marT="50800" marB="50800" anchor="t">
+                    <a:lnL w="6350" cap="flat" cmpd="sng" algn="ctr">
+                      <a:solidFill>
+                        <a:srgbClr val="BFE0D8"/>
+                      </a:solidFill>
+                      <a:prstDash val="solid"/>
+                      <a:round/>
+                      <a:headEnd type="none" w="med" len="med"/>
+                      <a:tailEnd type="none" w="med" len="med"/>
+                    </a:lnL>
+                    <a:lnR w="6350" cap="flat" cmpd="sng" algn="ctr">
+                      <a:solidFill>
+                        <a:srgbClr val="BFE0D8"/>
+                      </a:solidFill>
+                      <a:prstDash val="solid"/>
+                      <a:round/>
+                      <a:headEnd type="none" w="med" len="med"/>
+                      <a:tailEnd type="none" w="med" len="med"/>
+                    </a:lnR>
+                    <a:lnT w="6350" cap="flat" cmpd="sng" algn="ctr">
+                      <a:solidFill>
+                        <a:srgbClr val="BFE0D8"/>
+                      </a:solidFill>
+                      <a:prstDash val="solid"/>
+                      <a:round/>
+                      <a:headEnd type="none" w="med" len="med"/>
+                      <a:tailEnd type="none" w="med" len="med"/>
+                    </a:lnT>
+                    <a:lnB w="6350" cap="flat" cmpd="sng" algn="ctr">
+                      <a:solidFill>
+                        <a:srgbClr val="BFE0D8"/>
+                      </a:solidFill>
+                      <a:prstDash val="solid"/>
+                      <a:round/>
+                      <a:headEnd type="none" w="med" len="med"/>
+                      <a:tailEnd type="none" w="med" len="med"/>
+                    </a:lnB>
+                    <a:solidFill>
+                      <a:schemeClr val="bg2"/>
+                    </a:solidFill>
+                  </a:tcPr>
+                </a:tc>
+                <a:tc>
+                  <a:txBody>
+                    <a:bodyPr/>
+                    <a:lstStyle/>
+                    <a:p>
+                      <a:pPr indent="0" marL="0">
+                        <a:buNone/>
+                      </a:pPr>
+                      <a:r>
+                        <a:rPr lang="en-US" sz="1250" dirty="0">
+                          <a:solidFill>
+                            <a:schemeClr val="tx1"/>
+                          </a:solidFill>
+                        </a:rPr>
+                        <a:t>Pairings formed; pilots launched; pilots meeting agreed success criteria</a:t>
+                      </a:r>
+                      <a:endParaRPr lang="en-US" sz="1250" dirty="0"/>
+                    </a:p>
+                  </a:txBody>
+                  <a:tcPr marL="76200" marR="76200" marT="50800" marB="50800" anchor="t">
+                    <a:lnL w="6350" cap="flat" cmpd="sng" algn="ctr">
+                      <a:solidFill>
+                        <a:srgbClr val="BFE0D8"/>
+                      </a:solidFill>
+                      <a:prstDash val="solid"/>
+                      <a:round/>
+                      <a:headEnd type="none" w="med" len="med"/>
+                      <a:tailEnd type="none" w="med" len="med"/>
+                    </a:lnL>
+                    <a:lnR w="6350" cap="flat" cmpd="sng" algn="ctr">
+                      <a:solidFill>
+                        <a:srgbClr val="BFE0D8"/>
+                      </a:solidFill>
+                      <a:prstDash val="solid"/>
+                      <a:round/>
+                      <a:headEnd type="none" w="med" len="med"/>
+                      <a:tailEnd type="none" w="med" len="med"/>
+                    </a:lnR>
+                    <a:lnT w="6350" cap="flat" cmpd="sng" algn="ctr">
+                      <a:solidFill>
+                        <a:srgbClr val="BFE0D8"/>
+                      </a:solidFill>
+                      <a:prstDash val="solid"/>
+                      <a:round/>
+                      <a:headEnd type="none" w="med" len="med"/>
+                      <a:tailEnd type="none" w="med" len="med"/>
+                    </a:lnT>
+                    <a:lnB w="6350" cap="flat" cmpd="sng" algn="ctr">
+                      <a:solidFill>
+                        <a:srgbClr val="BFE0D8"/>
+                      </a:solidFill>
+                      <a:prstDash val="solid"/>
+                      <a:round/>
+                      <a:headEnd type="none" w="med" len="med"/>
+                      <a:tailEnd type="none" w="med" len="med"/>
+                    </a:lnB>
+                    <a:solidFill>
+                      <a:schemeClr val="bg2"/>
+                    </a:solidFill>
+                  </a:tcPr>
+                </a:tc>
+                <a:tc>
+                  <a:txBody>
+                    <a:bodyPr/>
+                    <a:lstStyle/>
+                    <a:p>
+                      <a:pPr indent="0" marL="0">
+                        <a:buNone/>
+                      </a:pPr>
+                      <a:r>
+                        <a:rPr lang="en-US" sz="1250" dirty="0">
+                          <a:solidFill>
+                            <a:schemeClr val="tx1"/>
+                          </a:solidFill>
+                        </a:rPr>
+                        <a:t>Phase 2 status webinar; collaborator reports; close-out</a:t>
+                      </a:r>
+                      <a:endParaRPr lang="en-US" sz="1250" dirty="0"/>
+                    </a:p>
+                  </a:txBody>
+                  <a:tcPr marL="76200" marR="76200" marT="50800" marB="50800" anchor="t">
+                    <a:lnL w="6350" cap="flat" cmpd="sng" algn="ctr">
+                      <a:solidFill>
+                        <a:srgbClr val="BFE0D8"/>
+                      </a:solidFill>
+                      <a:prstDash val="solid"/>
+                      <a:round/>
+                      <a:headEnd type="none" w="med" len="med"/>
+                      <a:tailEnd type="none" w="med" len="med"/>
+                    </a:lnL>
+                    <a:lnR w="6350" cap="flat" cmpd="sng" algn="ctr">
+                      <a:solidFill>
+                        <a:srgbClr val="BFE0D8"/>
+                      </a:solidFill>
+                      <a:prstDash val="solid"/>
+                      <a:round/>
+                      <a:headEnd type="none" w="med" len="med"/>
+                      <a:tailEnd type="none" w="med" len="med"/>
+                    </a:lnR>
+                    <a:lnT w="6350" cap="flat" cmpd="sng" algn="ctr">
+                      <a:solidFill>
+                        <a:srgbClr val="BFE0D8"/>
+                      </a:solidFill>
+                      <a:prstDash val="solid"/>
+                      <a:round/>
+                      <a:headEnd type="none" w="med" len="med"/>
+                      <a:tailEnd type="none" w="med" len="med"/>
+                    </a:lnT>
+                    <a:lnB w="6350" cap="flat" cmpd="sng" algn="ctr">
+                      <a:solidFill>
+                        <a:srgbClr val="BFE0D8"/>
+                      </a:solidFill>
+                      <a:prstDash val="solid"/>
+                      <a:round/>
+                      <a:headEnd type="none" w="med" len="med"/>
+                      <a:tailEnd type="none" w="med" len="med"/>
+                    </a:lnB>
+                    <a:solidFill>
+                      <a:schemeClr val="bg2"/>
+                    </a:solidFill>
+                  </a:tcPr>
+                </a:tc>
+                <a:tc>
+                  <a:txBody>
+                    <a:bodyPr/>
+                    <a:lstStyle/>
+                    <a:p>
+                      <a:pPr indent="0" marL="0">
+                        <a:buNone/>
+                      </a:pPr>
+                      <a:r>
+                        <a:rPr lang="en-US" sz="1250" b="1" dirty="0">
+                          <a:solidFill>
+                            <a:schemeClr val="accent2"/>
+                          </a:solidFill>
+                        </a:rPr>
+                        <a:t>HIGH  </a:t>
+                      </a:r>
+                      <a:pPr indent="0" marL="0">
+                        <a:buNone/>
+                      </a:pPr>
+                      <a:r>
+                        <a:rPr lang="en-US" sz="1250" dirty="0">
+                          <a:solidFill>
+                            <a:schemeClr val="tx1"/>
+                          </a:solidFill>
+                        </a:rPr>
+                        <a:t>Pilots lead to adoption, and quantum hardware matures enough to run the algorithms at useful scale (largely outside our control)</a:t>
+                      </a:r>
+                      <a:endParaRPr lang="en-US" sz="1250" dirty="0"/>
+                    </a:p>
+                  </a:txBody>
+                  <a:tcPr marL="76200" marR="76200" marT="50800" marB="50800" anchor="t">
+                    <a:lnL w="6350" cap="flat" cmpd="sng" algn="ctr">
+                      <a:solidFill>
+                        <a:srgbClr val="BFE0D8"/>
+                      </a:solidFill>
+                      <a:prstDash val="solid"/>
+                      <a:round/>
+                      <a:headEnd type="none" w="med" len="med"/>
+                      <a:tailEnd type="none" w="med" len="med"/>
+                    </a:lnL>
+                    <a:lnR w="6350" cap="flat" cmpd="sng" algn="ctr">
+                      <a:solidFill>
+                        <a:srgbClr val="BFE0D8"/>
+                      </a:solidFill>
+                      <a:prstDash val="solid"/>
+                      <a:round/>
+                      <a:headEnd type="none" w="med" len="med"/>
+                      <a:tailEnd type="none" w="med" len="med"/>
+                    </a:lnR>
+                    <a:lnT w="6350" cap="flat" cmpd="sng" algn="ctr">
+                      <a:solidFill>
+                        <a:srgbClr val="BFE0D8"/>
+                      </a:solidFill>
+                      <a:prstDash val="solid"/>
+                      <a:round/>
+                      <a:headEnd type="none" w="med" len="med"/>
+                      <a:tailEnd type="none" w="med" len="med"/>
+                    </a:lnT>
+                    <a:lnB w="6350" cap="flat" cmpd="sng" algn="ctr">
+                      <a:solidFill>
+                        <a:srgbClr val="BFE0D8"/>
+                      </a:solidFill>
+                      <a:prstDash val="solid"/>
+                      <a:round/>
+                      <a:headEnd type="none" w="med" len="med"/>
+                      <a:tailEnd type="none" w="med" len="med"/>
+                    </a:lnB>
+                    <a:solidFill>
+                      <a:schemeClr val="bg2"/>
+                    </a:solidFill>
+                  </a:tcPr>
+                </a:tc>
+              </a:tr>
+              <a:tr h="0">
+                <a:tc>
+                  <a:txBody>
+                    <a:bodyPr/>
+                    <a:lstStyle/>
+                    <a:p>
+                      <a:pPr indent="0" marL="0">
+                        <a:buNone/>
+                      </a:pPr>
+                      <a:r>
+                        <a:rPr lang="en-US" sz="1250" b="1" dirty="0">
+                          <a:solidFill>
+                            <a:schemeClr val="tx2"/>
+                          </a:solidFill>
+                        </a:rPr>
+                        <a:t>Outputs</a:t>
+                      </a:r>
+                      <a:endParaRPr lang="en-US" sz="1250" dirty="0"/>
+                    </a:p>
+                    <a:p>
+                      <a:pPr indent="0" marL="0">
+                        <a:buNone/>
+                      </a:pPr>
+                      <a:r>
+                        <a:rPr lang="en-US" sz="1250" i="1" dirty="0">
+                          <a:solidFill>
+                            <a:schemeClr val="accent5"/>
+                          </a:solidFill>
+                        </a:rPr>
+                        <a:t>Phase 1 results</a:t>
+                      </a:r>
+                      <a:endParaRPr lang="en-US" sz="1250" dirty="0"/>
+                    </a:p>
+                  </a:txBody>
+                  <a:tcPr marL="76200" marR="76200" marT="50800" marB="50800" anchor="t">
+                    <a:lnL w="6350" cap="flat" cmpd="sng" algn="ctr">
+                      <a:solidFill>
+                        <a:srgbClr val="BFE0D8"/>
+                      </a:solidFill>
+                      <a:prstDash val="solid"/>
+                      <a:round/>
+                      <a:headEnd type="none" w="med" len="med"/>
+                      <a:tailEnd type="none" w="med" len="med"/>
+                    </a:lnL>
+                    <a:lnR w="6350" cap="flat" cmpd="sng" algn="ctr">
+                      <a:solidFill>
+                        <a:srgbClr val="BFE0D8"/>
+                      </a:solidFill>
+                      <a:prstDash val="solid"/>
+                      <a:round/>
+                      <a:headEnd type="none" w="med" len="med"/>
+                      <a:tailEnd type="none" w="med" len="med"/>
+                    </a:lnR>
+                    <a:lnT w="6350" cap="flat" cmpd="sng" algn="ctr">
+                      <a:solidFill>
+                        <a:srgbClr val="BFE0D8"/>
+                      </a:solidFill>
+                      <a:prstDash val="solid"/>
+                      <a:round/>
+                      <a:headEnd type="none" w="med" len="med"/>
+                      <a:tailEnd type="none" w="med" len="med"/>
+                    </a:lnT>
+                    <a:lnB w="6350" cap="flat" cmpd="sng" algn="ctr">
+                      <a:solidFill>
+                        <a:srgbClr val="BFE0D8"/>
+                      </a:solidFill>
+                      <a:prstDash val="solid"/>
+                      <a:round/>
+                      <a:headEnd type="none" w="med" len="med"/>
+                      <a:tailEnd type="none" w="med" len="med"/>
+                    </a:lnB>
+                    <a:solidFill>
+                      <a:schemeClr val="bg1"/>
+                    </a:solidFill>
+                  </a:tcPr>
+                </a:tc>
+                <a:tc>
+                  <a:txBody>
+                    <a:bodyPr/>
+                    <a:lstStyle/>
+                    <a:p>
+                      <a:pPr indent="0" marL="0">
+                        <a:buNone/>
+                      </a:pPr>
+                      <a:r>
+                        <a:rPr lang="en-US" sz="1250" dirty="0">
+                          <a:solidFill>
+                            <a:schemeClr val="tx1"/>
+                          </a:solidFill>
+                        </a:rPr>
+                        <a:t>Up to 40 credible proposals with real use cases and benchmarks; winners verified and solutions to NSF by May 20, 2027</a:t>
+                      </a:r>
+                      <a:endParaRPr lang="en-US" sz="1250" dirty="0"/>
+                    </a:p>
+                  </a:txBody>
+                  <a:tcPr marL="76200" marR="76200" marT="50800" marB="50800" anchor="t">
+                    <a:lnL w="6350" cap="flat" cmpd="sng" algn="ctr">
+                      <a:solidFill>
+                        <a:srgbClr val="BFE0D8"/>
+                      </a:solidFill>
+                      <a:prstDash val="solid"/>
+                      <a:round/>
+                      <a:headEnd type="none" w="med" len="med"/>
+                      <a:tailEnd type="none" w="med" len="med"/>
+                    </a:lnL>
+                    <a:lnR w="6350" cap="flat" cmpd="sng" algn="ctr">
+                      <a:solidFill>
+                        <a:srgbClr val="BFE0D8"/>
+                      </a:solidFill>
+                      <a:prstDash val="solid"/>
+                      <a:round/>
+                      <a:headEnd type="none" w="med" len="med"/>
+                      <a:tailEnd type="none" w="med" len="med"/>
+                    </a:lnR>
+                    <a:lnT w="6350" cap="flat" cmpd="sng" algn="ctr">
+                      <a:solidFill>
+                        <a:srgbClr val="BFE0D8"/>
+                      </a:solidFill>
+                      <a:prstDash val="solid"/>
+                      <a:round/>
+                      <a:headEnd type="none" w="med" len="med"/>
+                      <a:tailEnd type="none" w="med" len="med"/>
+                    </a:lnT>
+                    <a:lnB w="6350" cap="flat" cmpd="sng" algn="ctr">
+                      <a:solidFill>
+                        <a:srgbClr val="BFE0D8"/>
+                      </a:solidFill>
+                      <a:prstDash val="solid"/>
+                      <a:round/>
+                      <a:headEnd type="none" w="med" len="med"/>
+                      <a:tailEnd type="none" w="med" len="med"/>
+                    </a:lnB>
+                    <a:solidFill>
+                      <a:schemeClr val="bg1"/>
+                    </a:solidFill>
+                  </a:tcPr>
+                </a:tc>
+                <a:tc>
+                  <a:txBody>
+                    <a:bodyPr/>
+                    <a:lstStyle/>
+                    <a:p>
+                      <a:pPr indent="0" marL="0">
+                        <a:buNone/>
+                      </a:pPr>
+                      <a:r>
+                        <a:rPr lang="en-US" sz="1250" dirty="0">
+                          <a:solidFill>
+                            <a:schemeClr val="tx1"/>
+                          </a:solidFill>
+                        </a:rPr>
+                        <a:t>Qualified submissions; share with classical baselines; EPSCoR share; on-time verification</a:t>
+                      </a:r>
+                      <a:endParaRPr lang="en-US" sz="1250" dirty="0"/>
+                    </a:p>
+                  </a:txBody>
+                  <a:tcPr marL="76200" marR="76200" marT="50800" marB="50800" anchor="t">
+                    <a:lnL w="6350" cap="flat" cmpd="sng" algn="ctr">
+                      <a:solidFill>
+                        <a:srgbClr val="BFE0D8"/>
+                      </a:solidFill>
+                      <a:prstDash val="solid"/>
+                      <a:round/>
+                      <a:headEnd type="none" w="med" len="med"/>
+                      <a:tailEnd type="none" w="med" len="med"/>
+                    </a:lnL>
+                    <a:lnR w="6350" cap="flat" cmpd="sng" algn="ctr">
+                      <a:solidFill>
+                        <a:srgbClr val="BFE0D8"/>
+                      </a:solidFill>
+                      <a:prstDash val="solid"/>
+                      <a:round/>
+                      <a:headEnd type="none" w="med" len="med"/>
+                      <a:tailEnd type="none" w="med" len="med"/>
+                    </a:lnR>
+                    <a:lnT w="6350" cap="flat" cmpd="sng" algn="ctr">
+                      <a:solidFill>
+                        <a:srgbClr val="BFE0D8"/>
+                      </a:solidFill>
+                      <a:prstDash val="solid"/>
+                      <a:round/>
+                      <a:headEnd type="none" w="med" len="med"/>
+                      <a:tailEnd type="none" w="med" len="med"/>
+                    </a:lnT>
+                    <a:lnB w="6350" cap="flat" cmpd="sng" algn="ctr">
+                      <a:solidFill>
+                        <a:srgbClr val="BFE0D8"/>
+                      </a:solidFill>
+                      <a:prstDash val="solid"/>
+                      <a:round/>
+                      <a:headEnd type="none" w="med" len="med"/>
+                      <a:tailEnd type="none" w="med" len="med"/>
+                    </a:lnB>
+                    <a:solidFill>
+                      <a:schemeClr val="bg1"/>
+                    </a:solidFill>
+                  </a:tcPr>
+                </a:tc>
+                <a:tc>
+                  <a:txBody>
+                    <a:bodyPr/>
+                    <a:lstStyle/>
+                    <a:p>
+                      <a:pPr indent="0" marL="0">
+                        <a:buNone/>
+                      </a:pPr>
+                      <a:r>
+                        <a:rPr lang="en-US" sz="1250" dirty="0">
+                          <a:solidFill>
+                            <a:schemeClr val="tx1"/>
+                          </a:solidFill>
+                        </a:rPr>
+                        <a:t>Platform data; judging records; RFTP §4.3 reports</a:t>
+                      </a:r>
+                      <a:endParaRPr lang="en-US" sz="1250" dirty="0"/>
+                    </a:p>
+                  </a:txBody>
+                  <a:tcPr marL="76200" marR="76200" marT="50800" marB="50800" anchor="t">
+                    <a:lnL w="6350" cap="flat" cmpd="sng" algn="ctr">
+                      <a:solidFill>
+                        <a:srgbClr val="BFE0D8"/>
+                      </a:solidFill>
+                      <a:prstDash val="solid"/>
+                      <a:round/>
+                      <a:headEnd type="none" w="med" len="med"/>
+                      <a:tailEnd type="none" w="med" len="med"/>
+                    </a:lnL>
+                    <a:lnR w="6350" cap="flat" cmpd="sng" algn="ctr">
+                      <a:solidFill>
+                        <a:srgbClr val="BFE0D8"/>
+                      </a:solidFill>
+                      <a:prstDash val="solid"/>
+                      <a:round/>
+                      <a:headEnd type="none" w="med" len="med"/>
+                      <a:tailEnd type="none" w="med" len="med"/>
+                    </a:lnR>
+                    <a:lnT w="6350" cap="flat" cmpd="sng" algn="ctr">
+                      <a:solidFill>
+                        <a:srgbClr val="BFE0D8"/>
+                      </a:solidFill>
+                      <a:prstDash val="solid"/>
+                      <a:round/>
+                      <a:headEnd type="none" w="med" len="med"/>
+                      <a:tailEnd type="none" w="med" len="med"/>
+                    </a:lnT>
+                    <a:lnB w="6350" cap="flat" cmpd="sng" algn="ctr">
+                      <a:solidFill>
+                        <a:srgbClr val="BFE0D8"/>
+                      </a:solidFill>
+                      <a:prstDash val="solid"/>
+                      <a:round/>
+                      <a:headEnd type="none" w="med" len="med"/>
+                      <a:tailEnd type="none" w="med" len="med"/>
+                    </a:lnB>
+                    <a:solidFill>
+                      <a:schemeClr val="bg1"/>
+                    </a:solidFill>
+                  </a:tcPr>
+                </a:tc>
+                <a:tc>
+                  <a:txBody>
+                    <a:bodyPr/>
+                    <a:lstStyle/>
+                    <a:p>
+                      <a:pPr indent="0" marL="0">
+                        <a:buNone/>
+                      </a:pPr>
+                      <a:r>
+                        <a:rPr lang="en-US" sz="1250" b="1" dirty="0">
+                          <a:solidFill>
+                            <a:schemeClr val="accent2"/>
+                          </a:solidFill>
+                        </a:rPr>
+                        <a:t>HIGH  </a:t>
+                      </a:r>
+                      <a:pPr indent="0" marL="0">
+                        <a:buNone/>
+                      </a:pPr>
+                      <a:r>
+                        <a:rPr lang="en-US" sz="1250" dirty="0">
+                          <a:solidFill>
+                            <a:schemeClr val="tx1"/>
+                          </a:solidFill>
+                        </a:rPr>
+                        <a:t>Winners fit collaborator problems; pairing capacity matches the winner count; the Phase 2 prize and terms keep teams engaged</a:t>
+                      </a:r>
+                      <a:endParaRPr lang="en-US" sz="1250" dirty="0"/>
+                    </a:p>
+                  </a:txBody>
+                  <a:tcPr marL="76200" marR="76200" marT="50800" marB="50800" anchor="t">
+                    <a:lnL w="6350" cap="flat" cmpd="sng" algn="ctr">
+                      <a:solidFill>
+                        <a:srgbClr val="BFE0D8"/>
+                      </a:solidFill>
+                      <a:prstDash val="solid"/>
+                      <a:round/>
+                      <a:headEnd type="none" w="med" len="med"/>
+                      <a:tailEnd type="none" w="med" len="med"/>
+                    </a:lnL>
+                    <a:lnR w="6350" cap="flat" cmpd="sng" algn="ctr">
+                      <a:solidFill>
+                        <a:srgbClr val="BFE0D8"/>
+                      </a:solidFill>
+                      <a:prstDash val="solid"/>
+                      <a:round/>
+                      <a:headEnd type="none" w="med" len="med"/>
+                      <a:tailEnd type="none" w="med" len="med"/>
+                    </a:lnR>
+                    <a:lnT w="6350" cap="flat" cmpd="sng" algn="ctr">
+                      <a:solidFill>
+                        <a:srgbClr val="BFE0D8"/>
+                      </a:solidFill>
+                      <a:prstDash val="solid"/>
+                      <a:round/>
+                      <a:headEnd type="none" w="med" len="med"/>
+                      <a:tailEnd type="none" w="med" len="med"/>
+                    </a:lnT>
+                    <a:lnB w="6350" cap="flat" cmpd="sng" algn="ctr">
+                      <a:solidFill>
+                        <a:srgbClr val="BFE0D8"/>
+                      </a:solidFill>
+                      <a:prstDash val="solid"/>
+                      <a:round/>
+                      <a:headEnd type="none" w="med" len="med"/>
+                      <a:tailEnd type="none" w="med" len="med"/>
+                    </a:lnB>
+                    <a:solidFill>
+                      <a:schemeClr val="bg1"/>
+                    </a:solidFill>
+                  </a:tcPr>
+                </a:tc>
+              </a:tr>
+              <a:tr h="0">
+                <a:tc>
+                  <a:txBody>
+                    <a:bodyPr/>
+                    <a:lstStyle/>
+                    <a:p>
+                      <a:pPr indent="0" marL="0">
+                        <a:buNone/>
+                      </a:pPr>
+                      <a:r>
+                        <a:rPr lang="en-US" sz="1250" b="1" dirty="0">
+                          <a:solidFill>
+                            <a:schemeClr val="tx2"/>
+                          </a:solidFill>
+                        </a:rPr>
+                        <a:t>Activities</a:t>
+                      </a:r>
+                      <a:endParaRPr lang="en-US" sz="1250" dirty="0"/>
+                    </a:p>
+                    <a:p>
+                      <a:pPr indent="0" marL="0">
+                        <a:buNone/>
+                      </a:pPr>
+                      <a:r>
+                        <a:rPr lang="en-US" sz="1250" i="1" dirty="0">
+                          <a:solidFill>
+                            <a:schemeClr val="accent5"/>
+                          </a:solidFill>
+                        </a:rPr>
+                        <a:t>Our delivery</a:t>
+                      </a:r>
+                      <a:endParaRPr lang="en-US" sz="1250" dirty="0"/>
+                    </a:p>
+                  </a:txBody>
+                  <a:tcPr marL="76200" marR="76200" marT="50800" marB="50800" anchor="t">
+                    <a:lnL w="6350" cap="flat" cmpd="sng" algn="ctr">
+                      <a:solidFill>
+                        <a:srgbClr val="BFE0D8"/>
+                      </a:solidFill>
+                      <a:prstDash val="solid"/>
+                      <a:round/>
+                      <a:headEnd type="none" w="med" len="med"/>
+                      <a:tailEnd type="none" w="med" len="med"/>
+                    </a:lnL>
+                    <a:lnR w="6350" cap="flat" cmpd="sng" algn="ctr">
+                      <a:solidFill>
+                        <a:srgbClr val="BFE0D8"/>
+                      </a:solidFill>
+                      <a:prstDash val="solid"/>
+                      <a:round/>
+                      <a:headEnd type="none" w="med" len="med"/>
+                      <a:tailEnd type="none" w="med" len="med"/>
+                    </a:lnR>
+                    <a:lnT w="6350" cap="flat" cmpd="sng" algn="ctr">
+                      <a:solidFill>
+                        <a:srgbClr val="BFE0D8"/>
+                      </a:solidFill>
+                      <a:prstDash val="solid"/>
+                      <a:round/>
+                      <a:headEnd type="none" w="med" len="med"/>
+                      <a:tailEnd type="none" w="med" len="med"/>
+                    </a:lnT>
+                    <a:lnB w="6350" cap="flat" cmpd="sng" algn="ctr">
+                      <a:solidFill>
+                        <a:srgbClr val="BFE0D8"/>
+                      </a:solidFill>
+                      <a:prstDash val="solid"/>
+                      <a:round/>
+                      <a:headEnd type="none" w="med" len="med"/>
+                      <a:tailEnd type="none" w="med" len="med"/>
+                    </a:lnB>
+                    <a:solidFill>
+                      <a:schemeClr val="bg2"/>
+                    </a:solidFill>
+                  </a:tcPr>
+                </a:tc>
+                <a:tc>
+                  <a:txBody>
+                    <a:bodyPr/>
+                    <a:lstStyle/>
+                    <a:p>
+                      <a:pPr indent="0" marL="0">
+                        <a:buNone/>
+                      </a:pPr>
+                      <a:r>
+                        <a:rPr lang="en-US" sz="1250" dirty="0">
+                          <a:solidFill>
+                            <a:schemeClr val="tx1"/>
+                          </a:solidFill>
+                        </a:rPr>
+                        <a:t>Rules, website, outreach incl. EPSCoR, webinars, judging, verification and payment, pairing logistics</a:t>
+                      </a:r>
+                      <a:endParaRPr lang="en-US" sz="1250" dirty="0"/>
+                    </a:p>
+                  </a:txBody>
+                  <a:tcPr marL="76200" marR="76200" marT="50800" marB="50800" anchor="t">
+                    <a:lnL w="6350" cap="flat" cmpd="sng" algn="ctr">
+                      <a:solidFill>
+                        <a:srgbClr val="BFE0D8"/>
+                      </a:solidFill>
+                      <a:prstDash val="solid"/>
+                      <a:round/>
+                      <a:headEnd type="none" w="med" len="med"/>
+                      <a:tailEnd type="none" w="med" len="med"/>
+                    </a:lnL>
+                    <a:lnR w="6350" cap="flat" cmpd="sng" algn="ctr">
+                      <a:solidFill>
+                        <a:srgbClr val="BFE0D8"/>
+                      </a:solidFill>
+                      <a:prstDash val="solid"/>
+                      <a:round/>
+                      <a:headEnd type="none" w="med" len="med"/>
+                      <a:tailEnd type="none" w="med" len="med"/>
+                    </a:lnR>
+                    <a:lnT w="6350" cap="flat" cmpd="sng" algn="ctr">
+                      <a:solidFill>
+                        <a:srgbClr val="BFE0D8"/>
+                      </a:solidFill>
+                      <a:prstDash val="solid"/>
+                      <a:round/>
+                      <a:headEnd type="none" w="med" len="med"/>
+                      <a:tailEnd type="none" w="med" len="med"/>
+                    </a:lnT>
+                    <a:lnB w="6350" cap="flat" cmpd="sng" algn="ctr">
+                      <a:solidFill>
+                        <a:srgbClr val="BFE0D8"/>
+                      </a:solidFill>
+                      <a:prstDash val="solid"/>
+                      <a:round/>
+                      <a:headEnd type="none" w="med" len="med"/>
+                      <a:tailEnd type="none" w="med" len="med"/>
+                    </a:lnB>
+                    <a:solidFill>
+                      <a:schemeClr val="bg2"/>
+                    </a:solidFill>
+                  </a:tcPr>
+                </a:tc>
+                <a:tc>
+                  <a:txBody>
+                    <a:bodyPr/>
+                    <a:lstStyle/>
+                    <a:p>
+                      <a:pPr indent="0" marL="0">
+                        <a:buNone/>
+                      </a:pPr>
+                      <a:r>
+                        <a:rPr lang="en-US" sz="1250" dirty="0">
+                          <a:solidFill>
+                            <a:schemeClr val="tx1"/>
+                          </a:solidFill>
+                        </a:rPr>
+                        <a:t>Launch in early Dec 2026; milestones on schedule</a:t>
+                      </a:r>
+                      <a:endParaRPr lang="en-US" sz="1250" dirty="0"/>
+                    </a:p>
+                  </a:txBody>
+                  <a:tcPr marL="76200" marR="76200" marT="50800" marB="50800" anchor="t">
+                    <a:lnL w="6350" cap="flat" cmpd="sng" algn="ctr">
+                      <a:solidFill>
+                        <a:srgbClr val="BFE0D8"/>
+                      </a:solidFill>
+                      <a:prstDash val="solid"/>
+                      <a:round/>
+                      <a:headEnd type="none" w="med" len="med"/>
+                      <a:tailEnd type="none" w="med" len="med"/>
+                    </a:lnL>
+                    <a:lnR w="6350" cap="flat" cmpd="sng" algn="ctr">
+                      <a:solidFill>
+                        <a:srgbClr val="BFE0D8"/>
+                      </a:solidFill>
+                      <a:prstDash val="solid"/>
+                      <a:round/>
+                      <a:headEnd type="none" w="med" len="med"/>
+                      <a:tailEnd type="none" w="med" len="med"/>
+                    </a:lnR>
+                    <a:lnT w="6350" cap="flat" cmpd="sng" algn="ctr">
+                      <a:solidFill>
+                        <a:srgbClr val="BFE0D8"/>
+                      </a:solidFill>
+                      <a:prstDash val="solid"/>
+                      <a:round/>
+                      <a:headEnd type="none" w="med" len="med"/>
+                      <a:tailEnd type="none" w="med" len="med"/>
+                    </a:lnT>
+                    <a:lnB w="6350" cap="flat" cmpd="sng" algn="ctr">
+                      <a:solidFill>
+                        <a:srgbClr val="BFE0D8"/>
+                      </a:solidFill>
+                      <a:prstDash val="solid"/>
+                      <a:round/>
+                      <a:headEnd type="none" w="med" len="med"/>
+                      <a:tailEnd type="none" w="med" len="med"/>
+                    </a:lnB>
+                    <a:solidFill>
+                      <a:schemeClr val="bg2"/>
+                    </a:solidFill>
+                  </a:tcPr>
+                </a:tc>
+                <a:tc>
+                  <a:txBody>
+                    <a:bodyPr/>
+                    <a:lstStyle/>
+                    <a:p>
+                      <a:pPr indent="0" marL="0">
+                        <a:buNone/>
+                      </a:pPr>
+                      <a:r>
+                        <a:rPr lang="en-US" sz="1250" dirty="0">
+                          <a:solidFill>
+                            <a:schemeClr val="tx1"/>
+                          </a:solidFill>
+                        </a:rPr>
+                        <a:t>Status meetings; pre- and post-competition reports</a:t>
+                      </a:r>
+                      <a:endParaRPr lang="en-US" sz="1250" dirty="0"/>
+                    </a:p>
+                  </a:txBody>
+                  <a:tcPr marL="76200" marR="76200" marT="50800" marB="50800" anchor="t">
+                    <a:lnL w="6350" cap="flat" cmpd="sng" algn="ctr">
+                      <a:solidFill>
+                        <a:srgbClr val="BFE0D8"/>
+                      </a:solidFill>
+                      <a:prstDash val="solid"/>
+                      <a:round/>
+                      <a:headEnd type="none" w="med" len="med"/>
+                      <a:tailEnd type="none" w="med" len="med"/>
+                    </a:lnL>
+                    <a:lnR w="6350" cap="flat" cmpd="sng" algn="ctr">
+                      <a:solidFill>
+                        <a:srgbClr val="BFE0D8"/>
+                      </a:solidFill>
+                      <a:prstDash val="solid"/>
+                      <a:round/>
+                      <a:headEnd type="none" w="med" len="med"/>
+                      <a:tailEnd type="none" w="med" len="med"/>
+                    </a:lnR>
+                    <a:lnT w="6350" cap="flat" cmpd="sng" algn="ctr">
+                      <a:solidFill>
+                        <a:srgbClr val="BFE0D8"/>
+                      </a:solidFill>
+                      <a:prstDash val="solid"/>
+                      <a:round/>
+                      <a:headEnd type="none" w="med" len="med"/>
+                      <a:tailEnd type="none" w="med" len="med"/>
+                    </a:lnT>
+                    <a:lnB w="6350" cap="flat" cmpd="sng" algn="ctr">
+                      <a:solidFill>
+                        <a:srgbClr val="BFE0D8"/>
+                      </a:solidFill>
+                      <a:prstDash val="solid"/>
+                      <a:round/>
+                      <a:headEnd type="none" w="med" len="med"/>
+                      <a:tailEnd type="none" w="med" len="med"/>
+                    </a:lnB>
+                    <a:solidFill>
+                      <a:schemeClr val="bg2"/>
+                    </a:solidFill>
+                  </a:tcPr>
+                </a:tc>
+                <a:tc>
+                  <a:txBody>
+                    <a:bodyPr/>
+                    <a:lstStyle/>
+                    <a:p>
+                      <a:pPr indent="0" marL="0">
+                        <a:buNone/>
+                      </a:pPr>
+                      <a:r>
+                        <a:rPr lang="en-US" sz="1250" b="1" dirty="0">
+                          <a:solidFill>
+                            <a:schemeClr val="accent3"/>
+                          </a:solidFill>
+                        </a:rPr>
+                        <a:t>MEDIUM  </a:t>
+                      </a:r>
+                      <a:pPr indent="0" marL="0">
+                        <a:buNone/>
+                      </a:pPr>
+                      <a:r>
+                        <a:rPr lang="en-US" sz="1250" dirty="0">
+                          <a:solidFill>
+                            <a:schemeClr val="tx1"/>
+                          </a:solidFill>
+                        </a:rPr>
+                        <a:t>Enough qualified, diverse teams enter despite the quantum skills barrier and NSF-format documents, and paper proposals can be judged credibly</a:t>
+                      </a:r>
+                      <a:endParaRPr lang="en-US" sz="1250" dirty="0"/>
+                    </a:p>
+                  </a:txBody>
+                  <a:tcPr marL="76200" marR="76200" marT="50800" marB="50800" anchor="t">
+                    <a:lnL w="6350" cap="flat" cmpd="sng" algn="ctr">
+                      <a:solidFill>
+                        <a:srgbClr val="BFE0D8"/>
+                      </a:solidFill>
+                      <a:prstDash val="solid"/>
+                      <a:round/>
+                      <a:headEnd type="none" w="med" len="med"/>
+                      <a:tailEnd type="none" w="med" len="med"/>
+                    </a:lnL>
+                    <a:lnR w="6350" cap="flat" cmpd="sng" algn="ctr">
+                      <a:solidFill>
+                        <a:srgbClr val="BFE0D8"/>
+                      </a:solidFill>
+                      <a:prstDash val="solid"/>
+                      <a:round/>
+                      <a:headEnd type="none" w="med" len="med"/>
+                      <a:tailEnd type="none" w="med" len="med"/>
+                    </a:lnR>
+                    <a:lnT w="6350" cap="flat" cmpd="sng" algn="ctr">
+                      <a:solidFill>
+                        <a:srgbClr val="BFE0D8"/>
+                      </a:solidFill>
+                      <a:prstDash val="solid"/>
+                      <a:round/>
+                      <a:headEnd type="none" w="med" len="med"/>
+                      <a:tailEnd type="none" w="med" len="med"/>
+                    </a:lnT>
+                    <a:lnB w="6350" cap="flat" cmpd="sng" algn="ctr">
+                      <a:solidFill>
+                        <a:srgbClr val="BFE0D8"/>
+                      </a:solidFill>
+                      <a:prstDash val="solid"/>
+                      <a:round/>
+                      <a:headEnd type="none" w="med" len="med"/>
+                      <a:tailEnd type="none" w="med" len="med"/>
+                    </a:lnB>
+                    <a:solidFill>
+                      <a:schemeClr val="bg2"/>
+                    </a:solidFill>
+                  </a:tcPr>
+                </a:tc>
+              </a:tr>
+            </a:tbl>
+          </a:graphicData>
+        </a:graphic>
+      </p:graphicFrame>
+      <p:sp>
+        <p:nvSpPr>
+          <p:cNvPr id="4" name="Text 1"/>
+          <p:cNvSpPr txBox="1"/>
+          <p:nvPr/>
+        </p:nvSpPr>
+        <p:spPr>
+          <a:xfrm>
+            <a:off x="548640" y="5440680"/>
+            <a:ext cx="11064240" cy="548640"/>
+          </a:xfrm>
+          <a:prstGeom prst="rect">
+            <a:avLst/>
+          </a:prstGeom>
+          <a:noFill/>
+          <a:ln/>
+        </p:spPr>
+        <p:txBody>
+          <a:bodyPr wrap="square" lIns="0" tIns="0" rIns="0" bIns="0" rtlCol="0" anchor="t"/>
+          <a:lstStyle/>
+          <a:p>
+            <a:pPr indent="0" marL="0">
+              <a:buNone/>
+            </a:pPr>
+            <a:r>
+              <a:rPr lang="en-US" sz="1200" b="1" dirty="0">
+                <a:solidFill>
+                  <a:schemeClr val="tx2"/>
+                </a:solidFill>
+              </a:rPr>
+              <a:t>Read bottom-up: </a:t>
+            </a:r>
+            <a:pPr indent="0" marL="0">
+              <a:buNone/>
+            </a:pPr>
+            <a:r>
+              <a:rPr lang="en-US" sz="1200" dirty="0">
+                <a:solidFill>
+                  <a:schemeClr val="tx1"/>
+                </a:solidFill>
+              </a:rPr>
+              <a:t>if the activities happen and their assumptions hold, the outputs follow; if the outputs land and their assumptions hold, the purpose follows; and so on up to the goal. Preconditions for the activities: rules through NSF review by November, and collaborator inputs by mid-November.</a:t>
+            </a:r>
+            <a:endParaRPr lang="en-US" sz="1200" dirty="0"/>
+          </a:p>
+        </p:txBody>
+      </p:sp>
+      <p:sp>
+        <p:nvSpPr>
+          <p:cNvPr id="5" name="Text 2"/>
+          <p:cNvSpPr txBox="1"/>
+          <p:nvPr/>
+        </p:nvSpPr>
+        <p:spPr>
+          <a:xfrm>
+            <a:off x="548640" y="6053328"/>
+            <a:ext cx="11064240" cy="292608"/>
+          </a:xfrm>
+          <a:prstGeom prst="rect">
+            <a:avLst/>
+          </a:prstGeom>
+          <a:noFill/>
+          <a:ln/>
+        </p:spPr>
+        <p:txBody>
+          <a:bodyPr wrap="square" lIns="0" tIns="0" rIns="0" bIns="0" rtlCol="0" anchor="b"/>
+          <a:lstStyle/>
+          <a:p>
+            <a:pPr indent="0" marL="0">
+              <a:buNone/>
+            </a:pPr>
+            <a:r>
+              <a:rPr lang="en-US" sz="950" i="1" dirty="0">
+                <a:solidFill>
+                  <a:schemeClr val="accent5"/>
+                </a:solidFill>
+              </a:rPr>
+              <a:t>Logical framework format (narrative, indicators, means of verification, assumptions). Content: RFTP NOIS3-085 §1.2–1.3, §2.1, §3.1, §4.3. Risk ratings are our assessment for discussion.</a:t>
+            </a:r>
+            <a:endParaRPr lang="en-US" sz="950" dirty="0"/>
+          </a:p>
+        </p:txBody>
+      </p:sp>
+      <p:sp>
+        <p:nvSpPr>
+          <p:cNvPr id="25" name="Slide Number Placeholder 0"/>
+          <p:cNvSpPr>
+            <a:spLocks noGrp="1"/>
+          </p:cNvSpPr>
+          <p:nvPr>
+            <p:ph type="sldNum" sz="quarter" idx="4294967295"/>
+          </p:nvPr>
+        </p:nvSpPr>
+        <p:spPr>
+          <a:xfrm>
+            <a:off x="11064240" y="6382512"/>
+            <a:ext cx="548640" cy="274320"/>
+          </a:xfrm>
+          <a:prstGeom prst="rect">
+            <a:avLst/>
+          </a:prstGeom>
+          <a:extLst>
+            <a:ext uri="{C572A759-6A51-4108-AA02-DFA0A04FC94B}">
+              <ma14:wrappingTextBoxFlag xmlns:ma14="http://schemas.microsoft.com/office/mac/drawingml/2011/main" val="0"/>
+            </a:ext>
+          </a:extLst>
+        </p:spPr>
+        <p:txBody>
+          <a:bodyPr/>
+          <a:lstStyle>
+            <a:lvl1pPr>
+              <a:defRPr sz="1000">
+                <a:solidFill>
+                  <a:schemeClr val="accent5"/>
+                </a:solidFill>
+              </a:defRPr>
+            </a:lvl1pPr>
+          </a:lstStyle>
+          <a:p>
+            <a:pPr algn="r"/>
+            <a:fld id="{F7021451-1387-4CA6-816F-3879F97B5CBC}" type="slidenum">
+              <a:rPr b="0" lang="en-US"/>
+              <a:t>13</a:t>
+            </a:fld>
+            <a:endParaRPr lang="en-US"/>
+          </a:p>
+        </p:txBody>
+      </p:sp>
+    </p:spTree>
+  </p:cSld>
+  <p:clrMapOvr>
+    <a:masterClrMapping/>
+  </p:clrMapOvr>
+</p:sld>
+</file>
+
+<file path=ppt/slides/slide14.xml><?xml version="1.0" encoding="utf-8"?>
+<p:sld xmlns:a="http://schemas.openxmlformats.org/drawingml/2006/main" xmlns:r="http://schemas.openxmlformats.org/officeDocument/2006/relationships" xmlns:p="http://schemas.openxmlformats.org/presentationml/2006/main">
+  <p:cSld name="Slide 14">
+    <p:spTree>
+      <p:nvGrpSpPr>
+        <p:cNvPr id="1" name=""/>
+        <p:cNvGrpSpPr/>
+        <p:nvPr/>
+      </p:nvGrpSpPr>
+      <p:grpSpPr>
+        <a:xfrm>
+          <a:off x="0" y="0"/>
+          <a:ext cx="0" cy="0"/>
+          <a:chOff x="0" y="0"/>
+          <a:chExt cx="0" cy="0"/>
+        </a:xfrm>
+      </p:grpSpPr>
+      <p:sp>
+        <p:nvSpPr>
+          <p:cNvPr id="2" name="Text 0"/>
+          <p:cNvSpPr/>
+          <p:nvPr>
+            <p:ph idx="100" type="title" hasCustomPrompt="1"/>
+          </p:nvPr>
+        </p:nvSpPr>
+        <p:spPr>
+          <a:xfrm>
+            <a:off x="548640" y="320040"/>
+            <a:ext cx="11064240" cy="868680"/>
+          </a:xfrm>
+          <a:prstGeom prst="rect">
+            <a:avLst/>
+          </a:prstGeom>
+          <a:noFill/>
+          <a:ln/>
+        </p:spPr>
+        <p:txBody>
+          <a:bodyPr wrap="square" lIns="0" tIns="0" rIns="0" bIns="0" rtlCol="0" anchor="ctr"/>
+          <a:lstStyle/>
+          <a:p>
+            <a:pPr algn="l" indent="0" marL="0">
+              <a:buNone/>
+            </a:pPr>
+            <a:r>
+              <a:rPr lang="en-US" sz="2800" b="1" dirty="0">
+                <a:solidFill>
+                  <a:schemeClr val="tx2"/>
+                </a:solidFill>
+                <a:latin typeface="Cambria" pitchFamily="34" charset="0"/>
+                <a:ea typeface="Cambria" pitchFamily="34" charset="-122"/>
+                <a:cs typeface="Cambria" pitchFamily="34" charset="-120"/>
+              </a:rPr>
+              <a:t>The four assumptions to test early, and one to watch</a:t>
+            </a:r>
+            <a:endParaRPr lang="en-US" sz="2800" dirty="0"/>
+          </a:p>
+        </p:txBody>
+      </p:sp>
+      <p:graphicFrame>
+        <p:nvGraphicFramePr>
+          <p:cNvPr id="15" name="Table 0"/>
+          <p:cNvGraphicFramePr>
+            <a:graphicFrameLocks noGrp="1"/>
+          </p:cNvGraphicFramePr>
+          <p:nvPr>
+            <p:extLst>
+              <p:ext uri="{D42A27DB-BD31-4B8C-83A1-F6EECF244321}">
+                <p14:modId xmlns:p14="http://schemas.microsoft.com/office/powerpoint/2010/main" val="1579011935"/>
+              </p:ext>
+            </p:extLst>
+          </p:nvPr>
+        </p:nvGraphicFramePr>
+        <p:xfrm>
+          <a:off x="548640" y="1371600"/>
+          <a:ext cx="11064240" cy="914400"/>
+        </p:xfrm>
+        <a:graphic>
+          <a:graphicData uri="http://schemas.openxmlformats.org/drawingml/2006/table">
+            <a:tbl>
+              <a:tblPr/>
+              <a:tblGrid>
+                <a:gridCol w="914400"/>
+                <a:gridCol w="2651760"/>
+                <a:gridCol w="2514600"/>
+                <a:gridCol w="2697480"/>
+                <a:gridCol w="1234440"/>
+                <a:gridCol w="1051560"/>
+              </a:tblGrid>
+              <a:tr h="0">
+                <a:tc>
+                  <a:txBody>
+                    <a:bodyPr/>
+                    <a:lstStyle/>
+                    <a:p>
+                      <a:pPr indent="0" marL="0">
+                        <a:buNone/>
+                      </a:pPr>
+                      <a:r>
+                        <a:rPr lang="en-US" sz="1350" b="1" dirty="0">
+                          <a:solidFill>
+                            <a:schemeClr val="bg1"/>
+                          </a:solidFill>
+                        </a:rPr>
+                        <a:t>Risk</a:t>
+                      </a:r>
+                      <a:endParaRPr lang="en-US" sz="1350" dirty="0"/>
+                    </a:p>
+                  </a:txBody>
+                  <a:tcPr marL="76200" marR="76200" marT="50800" marB="50800" anchor="ctr">
+                    <a:lnL w="6350" cap="flat" cmpd="sng" algn="ctr">
+                      <a:solidFill>
+                        <a:srgbClr val="BFE0D8"/>
+                      </a:solidFill>
+                      <a:prstDash val="solid"/>
+                      <a:round/>
+                      <a:headEnd type="none" w="med" len="med"/>
+                      <a:tailEnd type="none" w="med" len="med"/>
+                    </a:lnL>
+                    <a:lnR w="6350" cap="flat" cmpd="sng" algn="ctr">
+                      <a:solidFill>
+                        <a:srgbClr val="BFE0D8"/>
+                      </a:solidFill>
+                      <a:prstDash val="solid"/>
+                      <a:round/>
+                      <a:headEnd type="none" w="med" len="med"/>
+                      <a:tailEnd type="none" w="med" len="med"/>
+                    </a:lnR>
+                    <a:lnT w="6350" cap="flat" cmpd="sng" algn="ctr">
+                      <a:solidFill>
+                        <a:srgbClr val="BFE0D8"/>
+                      </a:solidFill>
+                      <a:prstDash val="solid"/>
+                      <a:round/>
+                      <a:headEnd type="none" w="med" len="med"/>
+                      <a:tailEnd type="none" w="med" len="med"/>
+                    </a:lnT>
+                    <a:lnB w="6350" cap="flat" cmpd="sng" algn="ctr">
+                      <a:solidFill>
+                        <a:srgbClr val="BFE0D8"/>
+                      </a:solidFill>
+                      <a:prstDash val="solid"/>
+                      <a:round/>
+                      <a:headEnd type="none" w="med" len="med"/>
+                      <a:tailEnd type="none" w="med" len="med"/>
+                    </a:lnB>
+                    <a:solidFill>
+                      <a:schemeClr val="tx2"/>
+                    </a:solidFill>
+                  </a:tcPr>
+                </a:tc>
+                <a:tc>
+                  <a:txBody>
+                    <a:bodyPr/>
+                    <a:lstStyle/>
+                    <a:p>
+                      <a:pPr indent="0" marL="0">
+                        <a:buNone/>
+                      </a:pPr>
+                      <a:r>
+                        <a:rPr lang="en-US" sz="1350" b="1" dirty="0">
+                          <a:solidFill>
+                            <a:schemeClr val="bg1"/>
+                          </a:solidFill>
+                        </a:rPr>
+                        <a:t>Assumption</a:t>
+                      </a:r>
+                      <a:endParaRPr lang="en-US" sz="1350" dirty="0"/>
+                    </a:p>
+                  </a:txBody>
+                  <a:tcPr marL="76200" marR="76200" marT="50800" marB="50800" anchor="ctr">
+                    <a:lnL w="6350" cap="flat" cmpd="sng" algn="ctr">
+                      <a:solidFill>
+                        <a:srgbClr val="BFE0D8"/>
+                      </a:solidFill>
+                      <a:prstDash val="solid"/>
+                      <a:round/>
+                      <a:headEnd type="none" w="med" len="med"/>
+                      <a:tailEnd type="none" w="med" len="med"/>
+                    </a:lnL>
+                    <a:lnR w="6350" cap="flat" cmpd="sng" algn="ctr">
+                      <a:solidFill>
+                        <a:srgbClr val="BFE0D8"/>
+                      </a:solidFill>
+                      <a:prstDash val="solid"/>
+                      <a:round/>
+                      <a:headEnd type="none" w="med" len="med"/>
+                      <a:tailEnd type="none" w="med" len="med"/>
+                    </a:lnR>
+                    <a:lnT w="6350" cap="flat" cmpd="sng" algn="ctr">
+                      <a:solidFill>
+                        <a:srgbClr val="BFE0D8"/>
+                      </a:solidFill>
+                      <a:prstDash val="solid"/>
+                      <a:round/>
+                      <a:headEnd type="none" w="med" len="med"/>
+                      <a:tailEnd type="none" w="med" len="med"/>
+                    </a:lnT>
+                    <a:lnB w="6350" cap="flat" cmpd="sng" algn="ctr">
+                      <a:solidFill>
+                        <a:srgbClr val="BFE0D8"/>
+                      </a:solidFill>
+                      <a:prstDash val="solid"/>
+                      <a:round/>
+                      <a:headEnd type="none" w="med" len="med"/>
+                      <a:tailEnd type="none" w="med" len="med"/>
+                    </a:lnB>
+                    <a:solidFill>
+                      <a:schemeClr val="tx2"/>
+                    </a:solidFill>
+                  </a:tcPr>
+                </a:tc>
+                <a:tc>
+                  <a:txBody>
+                    <a:bodyPr/>
+                    <a:lstStyle/>
+                    <a:p>
+                      <a:pPr indent="0" marL="0">
+                        <a:buNone/>
+                      </a:pPr>
+                      <a:r>
+                        <a:rPr lang="en-US" sz="1350" b="1" dirty="0">
+                          <a:solidFill>
+                            <a:schemeClr val="bg1"/>
+                          </a:solidFill>
+                        </a:rPr>
+                        <a:t>Why it's risky</a:t>
+                      </a:r>
+                      <a:endParaRPr lang="en-US" sz="1350" dirty="0"/>
+                    </a:p>
+                  </a:txBody>
+                  <a:tcPr marL="76200" marR="76200" marT="50800" marB="50800" anchor="ctr">
+                    <a:lnL w="6350" cap="flat" cmpd="sng" algn="ctr">
+                      <a:solidFill>
+                        <a:srgbClr val="BFE0D8"/>
+                      </a:solidFill>
+                      <a:prstDash val="solid"/>
+                      <a:round/>
+                      <a:headEnd type="none" w="med" len="med"/>
+                      <a:tailEnd type="none" w="med" len="med"/>
+                    </a:lnL>
+                    <a:lnR w="6350" cap="flat" cmpd="sng" algn="ctr">
+                      <a:solidFill>
+                        <a:srgbClr val="BFE0D8"/>
+                      </a:solidFill>
+                      <a:prstDash val="solid"/>
+                      <a:round/>
+                      <a:headEnd type="none" w="med" len="med"/>
+                      <a:tailEnd type="none" w="med" len="med"/>
+                    </a:lnR>
+                    <a:lnT w="6350" cap="flat" cmpd="sng" algn="ctr">
+                      <a:solidFill>
+                        <a:srgbClr val="BFE0D8"/>
+                      </a:solidFill>
+                      <a:prstDash val="solid"/>
+                      <a:round/>
+                      <a:headEnd type="none" w="med" len="med"/>
+                      <a:tailEnd type="none" w="med" len="med"/>
+                    </a:lnT>
+                    <a:lnB w="6350" cap="flat" cmpd="sng" algn="ctr">
+                      <a:solidFill>
+                        <a:srgbClr val="BFE0D8"/>
+                      </a:solidFill>
+                      <a:prstDash val="solid"/>
+                      <a:round/>
+                      <a:headEnd type="none" w="med" len="med"/>
+                      <a:tailEnd type="none" w="med" len="med"/>
+                    </a:lnB>
+                    <a:solidFill>
+                      <a:schemeClr val="tx2"/>
+                    </a:solidFill>
+                  </a:tcPr>
+                </a:tc>
+                <a:tc>
+                  <a:txBody>
+                    <a:bodyPr/>
+                    <a:lstStyle/>
+                    <a:p>
+                      <a:pPr indent="0" marL="0">
+                        <a:buNone/>
+                      </a:pPr>
+                      <a:r>
+                        <a:rPr lang="en-US" sz="1350" b="1" dirty="0">
+                          <a:solidFill>
+                            <a:schemeClr val="bg1"/>
+                          </a:solidFill>
+                        </a:rPr>
+                        <a:t>Early test or signal</a:t>
+                      </a:r>
+                      <a:endParaRPr lang="en-US" sz="1350" dirty="0"/>
+                    </a:p>
+                  </a:txBody>
+                  <a:tcPr marL="76200" marR="76200" marT="50800" marB="50800" anchor="ctr">
+                    <a:lnL w="6350" cap="flat" cmpd="sng" algn="ctr">
+                      <a:solidFill>
+                        <a:srgbClr val="BFE0D8"/>
+                      </a:solidFill>
+                      <a:prstDash val="solid"/>
+                      <a:round/>
+                      <a:headEnd type="none" w="med" len="med"/>
+                      <a:tailEnd type="none" w="med" len="med"/>
+                    </a:lnL>
+                    <a:lnR w="6350" cap="flat" cmpd="sng" algn="ctr">
+                      <a:solidFill>
+                        <a:srgbClr val="BFE0D8"/>
+                      </a:solidFill>
+                      <a:prstDash val="solid"/>
+                      <a:round/>
+                      <a:headEnd type="none" w="med" len="med"/>
+                      <a:tailEnd type="none" w="med" len="med"/>
+                    </a:lnR>
+                    <a:lnT w="6350" cap="flat" cmpd="sng" algn="ctr">
+                      <a:solidFill>
+                        <a:srgbClr val="BFE0D8"/>
+                      </a:solidFill>
+                      <a:prstDash val="solid"/>
+                      <a:round/>
+                      <a:headEnd type="none" w="med" len="med"/>
+                      <a:tailEnd type="none" w="med" len="med"/>
+                    </a:lnT>
+                    <a:lnB w="6350" cap="flat" cmpd="sng" algn="ctr">
+                      <a:solidFill>
+                        <a:srgbClr val="BFE0D8"/>
+                      </a:solidFill>
+                      <a:prstDash val="solid"/>
+                      <a:round/>
+                      <a:headEnd type="none" w="med" len="med"/>
+                      <a:tailEnd type="none" w="med" len="med"/>
+                    </a:lnB>
+                    <a:solidFill>
+                      <a:schemeClr val="tx2"/>
+                    </a:solidFill>
+                  </a:tcPr>
+                </a:tc>
+                <a:tc>
+                  <a:txBody>
+                    <a:bodyPr/>
+                    <a:lstStyle/>
+                    <a:p>
+                      <a:pPr indent="0" marL="0">
+                        <a:buNone/>
+                      </a:pPr>
+                      <a:r>
+                        <a:rPr lang="en-US" sz="1350" b="1" dirty="0">
+                          <a:solidFill>
+                            <a:schemeClr val="bg1"/>
+                          </a:solidFill>
+                        </a:rPr>
+                        <a:t>When</a:t>
+                      </a:r>
+                      <a:endParaRPr lang="en-US" sz="1350" dirty="0"/>
+                    </a:p>
+                  </a:txBody>
+                  <a:tcPr marL="76200" marR="76200" marT="50800" marB="50800" anchor="ctr">
+                    <a:lnL w="6350" cap="flat" cmpd="sng" algn="ctr">
+                      <a:solidFill>
+                        <a:srgbClr val="BFE0D8"/>
+                      </a:solidFill>
+                      <a:prstDash val="solid"/>
+                      <a:round/>
+                      <a:headEnd type="none" w="med" len="med"/>
+                      <a:tailEnd type="none" w="med" len="med"/>
+                    </a:lnL>
+                    <a:lnR w="6350" cap="flat" cmpd="sng" algn="ctr">
+                      <a:solidFill>
+                        <a:srgbClr val="BFE0D8"/>
+                      </a:solidFill>
+                      <a:prstDash val="solid"/>
+                      <a:round/>
+                      <a:headEnd type="none" w="med" len="med"/>
+                      <a:tailEnd type="none" w="med" len="med"/>
+                    </a:lnR>
+                    <a:lnT w="6350" cap="flat" cmpd="sng" algn="ctr">
+                      <a:solidFill>
+                        <a:srgbClr val="BFE0D8"/>
+                      </a:solidFill>
+                      <a:prstDash val="solid"/>
+                      <a:round/>
+                      <a:headEnd type="none" w="med" len="med"/>
+                      <a:tailEnd type="none" w="med" len="med"/>
+                    </a:lnT>
+                    <a:lnB w="6350" cap="flat" cmpd="sng" algn="ctr">
+                      <a:solidFill>
+                        <a:srgbClr val="BFE0D8"/>
+                      </a:solidFill>
+                      <a:prstDash val="solid"/>
+                      <a:round/>
+                      <a:headEnd type="none" w="med" len="med"/>
+                      <a:tailEnd type="none" w="med" len="med"/>
+                    </a:lnB>
+                    <a:solidFill>
+                      <a:schemeClr val="tx2"/>
+                    </a:solidFill>
+                  </a:tcPr>
+                </a:tc>
+                <a:tc>
+                  <a:txBody>
+                    <a:bodyPr/>
+                    <a:lstStyle/>
+                    <a:p>
+                      <a:pPr indent="0" marL="0">
+                        <a:buNone/>
+                      </a:pPr>
+                      <a:r>
+                        <a:rPr lang="en-US" sz="1350" b="1" dirty="0">
+                          <a:solidFill>
+                            <a:schemeClr val="bg1"/>
+                          </a:solidFill>
+                        </a:rPr>
+                        <a:t>Linked to</a:t>
+                      </a:r>
+                      <a:endParaRPr lang="en-US" sz="1350" dirty="0"/>
+                    </a:p>
+                  </a:txBody>
+                  <a:tcPr marL="76200" marR="76200" marT="50800" marB="50800" anchor="ctr">
+                    <a:lnL w="6350" cap="flat" cmpd="sng" algn="ctr">
+                      <a:solidFill>
+                        <a:srgbClr val="BFE0D8"/>
+                      </a:solidFill>
+                      <a:prstDash val="solid"/>
+                      <a:round/>
+                      <a:headEnd type="none" w="med" len="med"/>
+                      <a:tailEnd type="none" w="med" len="med"/>
+                    </a:lnL>
+                    <a:lnR w="6350" cap="flat" cmpd="sng" algn="ctr">
+                      <a:solidFill>
+                        <a:srgbClr val="BFE0D8"/>
+                      </a:solidFill>
+                      <a:prstDash val="solid"/>
+                      <a:round/>
+                      <a:headEnd type="none" w="med" len="med"/>
+                      <a:tailEnd type="none" w="med" len="med"/>
+                    </a:lnR>
+                    <a:lnT w="6350" cap="flat" cmpd="sng" algn="ctr">
+                      <a:solidFill>
+                        <a:srgbClr val="BFE0D8"/>
+                      </a:solidFill>
+                      <a:prstDash val="solid"/>
+                      <a:round/>
+                      <a:headEnd type="none" w="med" len="med"/>
+                      <a:tailEnd type="none" w="med" len="med"/>
+                    </a:lnT>
+                    <a:lnB w="6350" cap="flat" cmpd="sng" algn="ctr">
+                      <a:solidFill>
+                        <a:srgbClr val="BFE0D8"/>
+                      </a:solidFill>
+                      <a:prstDash val="solid"/>
+                      <a:round/>
+                      <a:headEnd type="none" w="med" len="med"/>
+                      <a:tailEnd type="none" w="med" len="med"/>
+                    </a:lnB>
+                    <a:solidFill>
+                      <a:schemeClr val="tx2"/>
+                    </a:solidFill>
+                  </a:tcPr>
+                </a:tc>
+              </a:tr>
+              <a:tr h="0">
+                <a:tc>
+                  <a:txBody>
+                    <a:bodyPr/>
+                    <a:lstStyle/>
+                    <a:p>
+                      <a:pPr indent="0" marL="0">
+                        <a:buNone/>
+                      </a:pPr>
+                      <a:r>
+                        <a:rPr lang="en-US" sz="1350" b="1" dirty="0">
+                          <a:solidFill>
+                            <a:schemeClr val="accent2"/>
+                          </a:solidFill>
+                        </a:rPr>
+                        <a:t>HIGH</a:t>
+                      </a:r>
+                      <a:endParaRPr lang="en-US" sz="1350" dirty="0"/>
+                    </a:p>
+                  </a:txBody>
+                  <a:tcPr marL="76200" marR="76200" marT="50800" marB="50800" anchor="t">
+                    <a:lnL w="6350" cap="flat" cmpd="sng" algn="ctr">
+                      <a:solidFill>
+                        <a:srgbClr val="BFE0D8"/>
+                      </a:solidFill>
+                      <a:prstDash val="solid"/>
+                      <a:round/>
+                      <a:headEnd type="none" w="med" len="med"/>
+                      <a:tailEnd type="none" w="med" len="med"/>
+                    </a:lnL>
+                    <a:lnR w="6350" cap="flat" cmpd="sng" algn="ctr">
+                      <a:solidFill>
+                        <a:srgbClr val="BFE0D8"/>
+                      </a:solidFill>
+                      <a:prstDash val="solid"/>
+                      <a:round/>
+                      <a:headEnd type="none" w="med" len="med"/>
+                      <a:tailEnd type="none" w="med" len="med"/>
+                    </a:lnR>
+                    <a:lnT w="6350" cap="flat" cmpd="sng" algn="ctr">
+                      <a:solidFill>
+                        <a:srgbClr val="BFE0D8"/>
+                      </a:solidFill>
+                      <a:prstDash val="solid"/>
+                      <a:round/>
+                      <a:headEnd type="none" w="med" len="med"/>
+                      <a:tailEnd type="none" w="med" len="med"/>
+                    </a:lnT>
+                    <a:lnB w="6350" cap="flat" cmpd="sng" algn="ctr">
+                      <a:solidFill>
+                        <a:srgbClr val="BFE0D8"/>
+                      </a:solidFill>
+                      <a:prstDash val="solid"/>
+                      <a:round/>
+                      <a:headEnd type="none" w="med" len="med"/>
+                      <a:tailEnd type="none" w="med" len="med"/>
+                    </a:lnB>
+                    <a:solidFill>
+                      <a:schemeClr val="bg1"/>
+                    </a:solidFill>
+                  </a:tcPr>
+                </a:tc>
+                <a:tc>
+                  <a:txBody>
+                    <a:bodyPr/>
+                    <a:lstStyle/>
+                    <a:p>
+                      <a:pPr indent="0" marL="0">
+                        <a:buNone/>
+                      </a:pPr>
+                      <a:r>
+                        <a:rPr lang="en-US" sz="1350" b="1" dirty="0">
+                          <a:solidFill>
+                            <a:schemeClr val="tx1"/>
+                          </a:solidFill>
+                        </a:rPr>
+                        <a:t>Collaborators can pair with the number of winners</a:t>
+                      </a:r>
+                      <a:endParaRPr lang="en-US" sz="1350" dirty="0"/>
+                    </a:p>
+                  </a:txBody>
+                  <a:tcPr marL="76200" marR="76200" marT="50800" marB="50800" anchor="t">
+                    <a:lnL w="6350" cap="flat" cmpd="sng" algn="ctr">
+                      <a:solidFill>
+                        <a:srgbClr val="BFE0D8"/>
+                      </a:solidFill>
+                      <a:prstDash val="solid"/>
+                      <a:round/>
+                      <a:headEnd type="none" w="med" len="med"/>
+                      <a:tailEnd type="none" w="med" len="med"/>
+                    </a:lnL>
+                    <a:lnR w="6350" cap="flat" cmpd="sng" algn="ctr">
+                      <a:solidFill>
+                        <a:srgbClr val="BFE0D8"/>
+                      </a:solidFill>
+                      <a:prstDash val="solid"/>
+                      <a:round/>
+                      <a:headEnd type="none" w="med" len="med"/>
+                      <a:tailEnd type="none" w="med" len="med"/>
+                    </a:lnR>
+                    <a:lnT w="6350" cap="flat" cmpd="sng" algn="ctr">
+                      <a:solidFill>
+                        <a:srgbClr val="BFE0D8"/>
+                      </a:solidFill>
+                      <a:prstDash val="solid"/>
+                      <a:round/>
+                      <a:headEnd type="none" w="med" len="med"/>
+                      <a:tailEnd type="none" w="med" len="med"/>
+                    </a:lnT>
+                    <a:lnB w="6350" cap="flat" cmpd="sng" algn="ctr">
+                      <a:solidFill>
+                        <a:srgbClr val="BFE0D8"/>
+                      </a:solidFill>
+                      <a:prstDash val="solid"/>
+                      <a:round/>
+                      <a:headEnd type="none" w="med" len="med"/>
+                      <a:tailEnd type="none" w="med" len="med"/>
+                    </a:lnB>
+                    <a:solidFill>
+                      <a:schemeClr val="bg1"/>
+                    </a:solidFill>
+                  </a:tcPr>
+                </a:tc>
+                <a:tc>
+                  <a:txBody>
+                    <a:bodyPr/>
+                    <a:lstStyle/>
+                    <a:p>
+                      <a:pPr indent="0" marL="0">
+                        <a:buNone/>
+                      </a:pPr>
+                      <a:r>
+                        <a:rPr lang="en-US" sz="1350" dirty="0">
+                          <a:solidFill>
+                            <a:schemeClr val="tx1"/>
+                          </a:solidFill>
+                        </a:rPr>
+                        <a:t>If not, winners have nowhere to go</a:t>
+                      </a:r>
+                      <a:endParaRPr lang="en-US" sz="1350" dirty="0"/>
+                    </a:p>
+                  </a:txBody>
+                  <a:tcPr marL="76200" marR="76200" marT="50800" marB="50800" anchor="t">
+                    <a:lnL w="6350" cap="flat" cmpd="sng" algn="ctr">
+                      <a:solidFill>
+                        <a:srgbClr val="BFE0D8"/>
+                      </a:solidFill>
+                      <a:prstDash val="solid"/>
+                      <a:round/>
+                      <a:headEnd type="none" w="med" len="med"/>
+                      <a:tailEnd type="none" w="med" len="med"/>
+                    </a:lnL>
+                    <a:lnR w="6350" cap="flat" cmpd="sng" algn="ctr">
+                      <a:solidFill>
+                        <a:srgbClr val="BFE0D8"/>
+                      </a:solidFill>
+                      <a:prstDash val="solid"/>
+                      <a:round/>
+                      <a:headEnd type="none" w="med" len="med"/>
+                      <a:tailEnd type="none" w="med" len="med"/>
+                    </a:lnR>
+                    <a:lnT w="6350" cap="flat" cmpd="sng" algn="ctr">
+                      <a:solidFill>
+                        <a:srgbClr val="BFE0D8"/>
+                      </a:solidFill>
+                      <a:prstDash val="solid"/>
+                      <a:round/>
+                      <a:headEnd type="none" w="med" len="med"/>
+                      <a:tailEnd type="none" w="med" len="med"/>
+                    </a:lnT>
+                    <a:lnB w="6350" cap="flat" cmpd="sng" algn="ctr">
+                      <a:solidFill>
+                        <a:srgbClr val="BFE0D8"/>
+                      </a:solidFill>
+                      <a:prstDash val="solid"/>
+                      <a:round/>
+                      <a:headEnd type="none" w="med" len="med"/>
+                      <a:tailEnd type="none" w="med" len="med"/>
+                    </a:lnB>
+                    <a:solidFill>
+                      <a:schemeClr val="bg1"/>
+                    </a:solidFill>
+                  </a:tcPr>
+                </a:tc>
+                <a:tc>
+                  <a:txBody>
+                    <a:bodyPr/>
+                    <a:lstStyle/>
+                    <a:p>
+                      <a:pPr indent="0" marL="0">
+                        <a:buNone/>
+                      </a:pPr>
+                      <a:r>
+                        <a:rPr lang="en-US" sz="1350" dirty="0">
+                          <a:solidFill>
+                            <a:schemeClr val="tx1"/>
+                          </a:solidFill>
+                        </a:rPr>
+                        <a:t>Each company names a team count</a:t>
+                      </a:r>
+                      <a:endParaRPr lang="en-US" sz="1350" dirty="0"/>
+                    </a:p>
+                  </a:txBody>
+                  <a:tcPr marL="76200" marR="76200" marT="50800" marB="50800" anchor="t">
+                    <a:lnL w="6350" cap="flat" cmpd="sng" algn="ctr">
+                      <a:solidFill>
+                        <a:srgbClr val="BFE0D8"/>
+                      </a:solidFill>
+                      <a:prstDash val="solid"/>
+                      <a:round/>
+                      <a:headEnd type="none" w="med" len="med"/>
+                      <a:tailEnd type="none" w="med" len="med"/>
+                    </a:lnL>
+                    <a:lnR w="6350" cap="flat" cmpd="sng" algn="ctr">
+                      <a:solidFill>
+                        <a:srgbClr val="BFE0D8"/>
+                      </a:solidFill>
+                      <a:prstDash val="solid"/>
+                      <a:round/>
+                      <a:headEnd type="none" w="med" len="med"/>
+                      <a:tailEnd type="none" w="med" len="med"/>
+                    </a:lnR>
+                    <a:lnT w="6350" cap="flat" cmpd="sng" algn="ctr">
+                      <a:solidFill>
+                        <a:srgbClr val="BFE0D8"/>
+                      </a:solidFill>
+                      <a:prstDash val="solid"/>
+                      <a:round/>
+                      <a:headEnd type="none" w="med" len="med"/>
+                      <a:tailEnd type="none" w="med" len="med"/>
+                    </a:lnT>
+                    <a:lnB w="6350" cap="flat" cmpd="sng" algn="ctr">
+                      <a:solidFill>
+                        <a:srgbClr val="BFE0D8"/>
+                      </a:solidFill>
+                      <a:prstDash val="solid"/>
+                      <a:round/>
+                      <a:headEnd type="none" w="med" len="med"/>
+                      <a:tailEnd type="none" w="med" len="med"/>
+                    </a:lnB>
+                    <a:solidFill>
+                      <a:schemeClr val="bg1"/>
+                    </a:solidFill>
+                  </a:tcPr>
+                </a:tc>
+                <a:tc>
+                  <a:txBody>
+                    <a:bodyPr/>
+                    <a:lstStyle/>
+                    <a:p>
+                      <a:pPr indent="0" marL="0">
+                        <a:buNone/>
+                      </a:pPr>
+                      <a:r>
+                        <a:rPr lang="en-US" sz="1350" dirty="0">
+                          <a:solidFill>
+                            <a:schemeClr val="tx1"/>
+                          </a:solidFill>
+                        </a:rPr>
+                        <a:t>Late Oct 2026</a:t>
+                      </a:r>
+                      <a:endParaRPr lang="en-US" sz="1350" dirty="0"/>
+                    </a:p>
+                  </a:txBody>
+                  <a:tcPr marL="76200" marR="76200" marT="50800" marB="50800" anchor="t">
+                    <a:lnL w="6350" cap="flat" cmpd="sng" algn="ctr">
+                      <a:solidFill>
+                        <a:srgbClr val="BFE0D8"/>
+                      </a:solidFill>
+                      <a:prstDash val="solid"/>
+                      <a:round/>
+                      <a:headEnd type="none" w="med" len="med"/>
+                      <a:tailEnd type="none" w="med" len="med"/>
+                    </a:lnL>
+                    <a:lnR w="6350" cap="flat" cmpd="sng" algn="ctr">
+                      <a:solidFill>
+                        <a:srgbClr val="BFE0D8"/>
+                      </a:solidFill>
+                      <a:prstDash val="solid"/>
+                      <a:round/>
+                      <a:headEnd type="none" w="med" len="med"/>
+                      <a:tailEnd type="none" w="med" len="med"/>
+                    </a:lnR>
+                    <a:lnT w="6350" cap="flat" cmpd="sng" algn="ctr">
+                      <a:solidFill>
+                        <a:srgbClr val="BFE0D8"/>
+                      </a:solidFill>
+                      <a:prstDash val="solid"/>
+                      <a:round/>
+                      <a:headEnd type="none" w="med" len="med"/>
+                      <a:tailEnd type="none" w="med" len="med"/>
+                    </a:lnT>
+                    <a:lnB w="6350" cap="flat" cmpd="sng" algn="ctr">
+                      <a:solidFill>
+                        <a:srgbClr val="BFE0D8"/>
+                      </a:solidFill>
+                      <a:prstDash val="solid"/>
+                      <a:round/>
+                      <a:headEnd type="none" w="med" len="med"/>
+                      <a:tailEnd type="none" w="med" len="med"/>
+                    </a:lnB>
+                    <a:solidFill>
+                      <a:schemeClr val="bg1"/>
+                    </a:solidFill>
+                  </a:tcPr>
+                </a:tc>
+                <a:tc>
+                  <a:txBody>
+                    <a:bodyPr/>
+                    <a:lstStyle/>
+                    <a:p>
+                      <a:pPr indent="0" marL="0">
+                        <a:buNone/>
+                      </a:pPr>
+                      <a:r>
+                        <a:rPr lang="en-US" sz="1350" dirty="0">
+                          <a:solidFill>
+                            <a:schemeClr val="tx1"/>
+                          </a:solidFill>
+                        </a:rPr>
+                        <a:t>Ask 1</a:t>
+                      </a:r>
+                      <a:endParaRPr lang="en-US" sz="1350" dirty="0"/>
+                    </a:p>
+                  </a:txBody>
+                  <a:tcPr marL="76200" marR="76200" marT="50800" marB="50800" anchor="t">
+                    <a:lnL w="6350" cap="flat" cmpd="sng" algn="ctr">
+                      <a:solidFill>
+                        <a:srgbClr val="BFE0D8"/>
+                      </a:solidFill>
+                      <a:prstDash val="solid"/>
+                      <a:round/>
+                      <a:headEnd type="none" w="med" len="med"/>
+                      <a:tailEnd type="none" w="med" len="med"/>
+                    </a:lnL>
+                    <a:lnR w="6350" cap="flat" cmpd="sng" algn="ctr">
+                      <a:solidFill>
+                        <a:srgbClr val="BFE0D8"/>
+                      </a:solidFill>
+                      <a:prstDash val="solid"/>
+                      <a:round/>
+                      <a:headEnd type="none" w="med" len="med"/>
+                      <a:tailEnd type="none" w="med" len="med"/>
+                    </a:lnR>
+                    <a:lnT w="6350" cap="flat" cmpd="sng" algn="ctr">
+                      <a:solidFill>
+                        <a:srgbClr val="BFE0D8"/>
+                      </a:solidFill>
+                      <a:prstDash val="solid"/>
+                      <a:round/>
+                      <a:headEnd type="none" w="med" len="med"/>
+                      <a:tailEnd type="none" w="med" len="med"/>
+                    </a:lnT>
+                    <a:lnB w="6350" cap="flat" cmpd="sng" algn="ctr">
+                      <a:solidFill>
+                        <a:srgbClr val="BFE0D8"/>
+                      </a:solidFill>
+                      <a:prstDash val="solid"/>
+                      <a:round/>
+                      <a:headEnd type="none" w="med" len="med"/>
+                      <a:tailEnd type="none" w="med" len="med"/>
+                    </a:lnB>
+                    <a:solidFill>
+                      <a:schemeClr val="bg1"/>
+                    </a:solidFill>
+                  </a:tcPr>
+                </a:tc>
+              </a:tr>
+              <a:tr h="0">
+                <a:tc>
+                  <a:txBody>
+                    <a:bodyPr/>
+                    <a:lstStyle/>
+                    <a:p>
+                      <a:pPr indent="0" marL="0">
+                        <a:buNone/>
+                      </a:pPr>
+                      <a:r>
+                        <a:rPr lang="en-US" sz="1350" b="1" dirty="0">
+                          <a:solidFill>
+                            <a:schemeClr val="accent2"/>
+                          </a:solidFill>
+                        </a:rPr>
+                        <a:t>HIGH</a:t>
+                      </a:r>
+                      <a:endParaRPr lang="en-US" sz="1350" dirty="0"/>
+                    </a:p>
+                  </a:txBody>
+                  <a:tcPr marL="76200" marR="76200" marT="50800" marB="50800" anchor="t">
+                    <a:lnL w="6350" cap="flat" cmpd="sng" algn="ctr">
+                      <a:solidFill>
+                        <a:srgbClr val="BFE0D8"/>
+                      </a:solidFill>
+                      <a:prstDash val="solid"/>
+                      <a:round/>
+                      <a:headEnd type="none" w="med" len="med"/>
+                      <a:tailEnd type="none" w="med" len="med"/>
+                    </a:lnL>
+                    <a:lnR w="6350" cap="flat" cmpd="sng" algn="ctr">
+                      <a:solidFill>
+                        <a:srgbClr val="BFE0D8"/>
+                      </a:solidFill>
+                      <a:prstDash val="solid"/>
+                      <a:round/>
+                      <a:headEnd type="none" w="med" len="med"/>
+                      <a:tailEnd type="none" w="med" len="med"/>
+                    </a:lnR>
+                    <a:lnT w="6350" cap="flat" cmpd="sng" algn="ctr">
+                      <a:solidFill>
+                        <a:srgbClr val="BFE0D8"/>
+                      </a:solidFill>
+                      <a:prstDash val="solid"/>
+                      <a:round/>
+                      <a:headEnd type="none" w="med" len="med"/>
+                      <a:tailEnd type="none" w="med" len="med"/>
+                    </a:lnT>
+                    <a:lnB w="6350" cap="flat" cmpd="sng" algn="ctr">
+                      <a:solidFill>
+                        <a:srgbClr val="BFE0D8"/>
+                      </a:solidFill>
+                      <a:prstDash val="solid"/>
+                      <a:round/>
+                      <a:headEnd type="none" w="med" len="med"/>
+                      <a:tailEnd type="none" w="med" len="med"/>
+                    </a:lnB>
+                    <a:solidFill>
+                      <a:schemeClr val="bg2"/>
+                    </a:solidFill>
+                  </a:tcPr>
+                </a:tc>
+                <a:tc>
+                  <a:txBody>
+                    <a:bodyPr/>
+                    <a:lstStyle/>
+                    <a:p>
+                      <a:pPr indent="0" marL="0">
+                        <a:buNone/>
+                      </a:pPr>
+                      <a:r>
+                        <a:rPr lang="en-US" sz="1350" b="1" dirty="0">
+                          <a:solidFill>
+                            <a:schemeClr val="tx1"/>
+                          </a:solidFill>
+                        </a:rPr>
+                        <a:t>Paper proposals can show real quantum value</a:t>
+                      </a:r>
+                      <a:endParaRPr lang="en-US" sz="1350" dirty="0"/>
+                    </a:p>
+                  </a:txBody>
+                  <a:tcPr marL="76200" marR="76200" marT="50800" marB="50800" anchor="t">
+                    <a:lnL w="6350" cap="flat" cmpd="sng" algn="ctr">
+                      <a:solidFill>
+                        <a:srgbClr val="BFE0D8"/>
+                      </a:solidFill>
+                      <a:prstDash val="solid"/>
+                      <a:round/>
+                      <a:headEnd type="none" w="med" len="med"/>
+                      <a:tailEnd type="none" w="med" len="med"/>
+                    </a:lnL>
+                    <a:lnR w="6350" cap="flat" cmpd="sng" algn="ctr">
+                      <a:solidFill>
+                        <a:srgbClr val="BFE0D8"/>
+                      </a:solidFill>
+                      <a:prstDash val="solid"/>
+                      <a:round/>
+                      <a:headEnd type="none" w="med" len="med"/>
+                      <a:tailEnd type="none" w="med" len="med"/>
+                    </a:lnR>
+                    <a:lnT w="6350" cap="flat" cmpd="sng" algn="ctr">
+                      <a:solidFill>
+                        <a:srgbClr val="BFE0D8"/>
+                      </a:solidFill>
+                      <a:prstDash val="solid"/>
+                      <a:round/>
+                      <a:headEnd type="none" w="med" len="med"/>
+                      <a:tailEnd type="none" w="med" len="med"/>
+                    </a:lnT>
+                    <a:lnB w="6350" cap="flat" cmpd="sng" algn="ctr">
+                      <a:solidFill>
+                        <a:srgbClr val="BFE0D8"/>
+                      </a:solidFill>
+                      <a:prstDash val="solid"/>
+                      <a:round/>
+                      <a:headEnd type="none" w="med" len="med"/>
+                      <a:tailEnd type="none" w="med" len="med"/>
+                    </a:lnB>
+                    <a:solidFill>
+                      <a:schemeClr val="bg2"/>
+                    </a:solidFill>
+                  </a:tcPr>
+                </a:tc>
+                <a:tc>
+                  <a:txBody>
+                    <a:bodyPr/>
+                    <a:lstStyle/>
+                    <a:p>
+                      <a:pPr indent="0" marL="0">
+                        <a:buNone/>
+                      </a:pPr>
+                      <a:r>
+                        <a:rPr lang="en-US" sz="1350" dirty="0">
+                          <a:solidFill>
+                            <a:schemeClr val="tx1"/>
+                          </a:solidFill>
+                        </a:rPr>
+                        <a:t>Claims of advantage are hard to verify without hardware</a:t>
+                      </a:r>
+                      <a:endParaRPr lang="en-US" sz="1350" dirty="0"/>
+                    </a:p>
+                  </a:txBody>
+                  <a:tcPr marL="76200" marR="76200" marT="50800" marB="50800" anchor="t">
+                    <a:lnL w="6350" cap="flat" cmpd="sng" algn="ctr">
+                      <a:solidFill>
+                        <a:srgbClr val="BFE0D8"/>
+                      </a:solidFill>
+                      <a:prstDash val="solid"/>
+                      <a:round/>
+                      <a:headEnd type="none" w="med" len="med"/>
+                      <a:tailEnd type="none" w="med" len="med"/>
+                    </a:lnL>
+                    <a:lnR w="6350" cap="flat" cmpd="sng" algn="ctr">
+                      <a:solidFill>
+                        <a:srgbClr val="BFE0D8"/>
+                      </a:solidFill>
+                      <a:prstDash val="solid"/>
+                      <a:round/>
+                      <a:headEnd type="none" w="med" len="med"/>
+                      <a:tailEnd type="none" w="med" len="med"/>
+                    </a:lnR>
+                    <a:lnT w="6350" cap="flat" cmpd="sng" algn="ctr">
+                      <a:solidFill>
+                        <a:srgbClr val="BFE0D8"/>
+                      </a:solidFill>
+                      <a:prstDash val="solid"/>
+                      <a:round/>
+                      <a:headEnd type="none" w="med" len="med"/>
+                      <a:tailEnd type="none" w="med" len="med"/>
+                    </a:lnT>
+                    <a:lnB w="6350" cap="flat" cmpd="sng" algn="ctr">
+                      <a:solidFill>
+                        <a:srgbClr val="BFE0D8"/>
+                      </a:solidFill>
+                      <a:prstDash val="solid"/>
+                      <a:round/>
+                      <a:headEnd type="none" w="med" len="med"/>
+                      <a:tailEnd type="none" w="med" len="med"/>
+                    </a:lnB>
+                    <a:solidFill>
+                      <a:schemeClr val="bg2"/>
+                    </a:solidFill>
+                  </a:tcPr>
+                </a:tc>
+                <a:tc>
+                  <a:txBody>
+                    <a:bodyPr/>
+                    <a:lstStyle/>
+                    <a:p>
+                      <a:pPr indent="0" marL="0">
+                        <a:buNone/>
+                      </a:pPr>
+                      <a:r>
+                        <a:rPr lang="en-US" sz="1350" dirty="0">
+                          <a:solidFill>
+                            <a:schemeClr val="tx1"/>
+                          </a:solidFill>
+                        </a:rPr>
+                        <a:t>Mock-judge two or three sample entries against classical baselines</a:t>
+                      </a:r>
+                      <a:endParaRPr lang="en-US" sz="1350" dirty="0"/>
+                    </a:p>
+                  </a:txBody>
+                  <a:tcPr marL="76200" marR="76200" marT="50800" marB="50800" anchor="t">
+                    <a:lnL w="6350" cap="flat" cmpd="sng" algn="ctr">
+                      <a:solidFill>
+                        <a:srgbClr val="BFE0D8"/>
+                      </a:solidFill>
+                      <a:prstDash val="solid"/>
+                      <a:round/>
+                      <a:headEnd type="none" w="med" len="med"/>
+                      <a:tailEnd type="none" w="med" len="med"/>
+                    </a:lnL>
+                    <a:lnR w="6350" cap="flat" cmpd="sng" algn="ctr">
+                      <a:solidFill>
+                        <a:srgbClr val="BFE0D8"/>
+                      </a:solidFill>
+                      <a:prstDash val="solid"/>
+                      <a:round/>
+                      <a:headEnd type="none" w="med" len="med"/>
+                      <a:tailEnd type="none" w="med" len="med"/>
+                    </a:lnR>
+                    <a:lnT w="6350" cap="flat" cmpd="sng" algn="ctr">
+                      <a:solidFill>
+                        <a:srgbClr val="BFE0D8"/>
+                      </a:solidFill>
+                      <a:prstDash val="solid"/>
+                      <a:round/>
+                      <a:headEnd type="none" w="med" len="med"/>
+                      <a:tailEnd type="none" w="med" len="med"/>
+                    </a:lnT>
+                    <a:lnB w="6350" cap="flat" cmpd="sng" algn="ctr">
+                      <a:solidFill>
+                        <a:srgbClr val="BFE0D8"/>
+                      </a:solidFill>
+                      <a:prstDash val="solid"/>
+                      <a:round/>
+                      <a:headEnd type="none" w="med" len="med"/>
+                      <a:tailEnd type="none" w="med" len="med"/>
+                    </a:lnB>
+                    <a:solidFill>
+                      <a:schemeClr val="bg2"/>
+                    </a:solidFill>
+                  </a:tcPr>
+                </a:tc>
+                <a:tc>
+                  <a:txBody>
+                    <a:bodyPr/>
+                    <a:lstStyle/>
+                    <a:p>
+                      <a:pPr indent="0" marL="0">
+                        <a:buNone/>
+                      </a:pPr>
+                      <a:r>
+                        <a:rPr lang="en-US" sz="1350" dirty="0">
+                          <a:solidFill>
+                            <a:schemeClr val="tx1"/>
+                          </a:solidFill>
+                        </a:rPr>
+                        <a:t>Jan 2027</a:t>
+                      </a:r>
+                      <a:endParaRPr lang="en-US" sz="1350" dirty="0"/>
+                    </a:p>
+                  </a:txBody>
+                  <a:tcPr marL="76200" marR="76200" marT="50800" marB="50800" anchor="t">
+                    <a:lnL w="6350" cap="flat" cmpd="sng" algn="ctr">
+                      <a:solidFill>
+                        <a:srgbClr val="BFE0D8"/>
+                      </a:solidFill>
+                      <a:prstDash val="solid"/>
+                      <a:round/>
+                      <a:headEnd type="none" w="med" len="med"/>
+                      <a:tailEnd type="none" w="med" len="med"/>
+                    </a:lnL>
+                    <a:lnR w="6350" cap="flat" cmpd="sng" algn="ctr">
+                      <a:solidFill>
+                        <a:srgbClr val="BFE0D8"/>
+                      </a:solidFill>
+                      <a:prstDash val="solid"/>
+                      <a:round/>
+                      <a:headEnd type="none" w="med" len="med"/>
+                      <a:tailEnd type="none" w="med" len="med"/>
+                    </a:lnR>
+                    <a:lnT w="6350" cap="flat" cmpd="sng" algn="ctr">
+                      <a:solidFill>
+                        <a:srgbClr val="BFE0D8"/>
+                      </a:solidFill>
+                      <a:prstDash val="solid"/>
+                      <a:round/>
+                      <a:headEnd type="none" w="med" len="med"/>
+                      <a:tailEnd type="none" w="med" len="med"/>
+                    </a:lnT>
+                    <a:lnB w="6350" cap="flat" cmpd="sng" algn="ctr">
+                      <a:solidFill>
+                        <a:srgbClr val="BFE0D8"/>
+                      </a:solidFill>
+                      <a:prstDash val="solid"/>
+                      <a:round/>
+                      <a:headEnd type="none" w="med" len="med"/>
+                      <a:tailEnd type="none" w="med" len="med"/>
+                    </a:lnB>
+                    <a:solidFill>
+                      <a:schemeClr val="bg2"/>
+                    </a:solidFill>
+                  </a:tcPr>
+                </a:tc>
+                <a:tc>
+                  <a:txBody>
+                    <a:bodyPr/>
+                    <a:lstStyle/>
+                    <a:p>
+                      <a:pPr indent="0" marL="0">
+                        <a:buNone/>
+                      </a:pPr>
+                      <a:r>
+                        <a:rPr lang="en-US" sz="1350" dirty="0">
+                          <a:solidFill>
+                            <a:schemeClr val="tx1"/>
+                          </a:solidFill>
+                        </a:rPr>
+                        <a:t>Judging design</a:t>
+                      </a:r>
+                      <a:endParaRPr lang="en-US" sz="1350" dirty="0"/>
+                    </a:p>
+                  </a:txBody>
+                  <a:tcPr marL="76200" marR="76200" marT="50800" marB="50800" anchor="t">
+                    <a:lnL w="6350" cap="flat" cmpd="sng" algn="ctr">
+                      <a:solidFill>
+                        <a:srgbClr val="BFE0D8"/>
+                      </a:solidFill>
+                      <a:prstDash val="solid"/>
+                      <a:round/>
+                      <a:headEnd type="none" w="med" len="med"/>
+                      <a:tailEnd type="none" w="med" len="med"/>
+                    </a:lnL>
+                    <a:lnR w="6350" cap="flat" cmpd="sng" algn="ctr">
+                      <a:solidFill>
+                        <a:srgbClr val="BFE0D8"/>
+                      </a:solidFill>
+                      <a:prstDash val="solid"/>
+                      <a:round/>
+                      <a:headEnd type="none" w="med" len="med"/>
+                      <a:tailEnd type="none" w="med" len="med"/>
+                    </a:lnR>
+                    <a:lnT w="6350" cap="flat" cmpd="sng" algn="ctr">
+                      <a:solidFill>
+                        <a:srgbClr val="BFE0D8"/>
+                      </a:solidFill>
+                      <a:prstDash val="solid"/>
+                      <a:round/>
+                      <a:headEnd type="none" w="med" len="med"/>
+                      <a:tailEnd type="none" w="med" len="med"/>
+                    </a:lnT>
+                    <a:lnB w="6350" cap="flat" cmpd="sng" algn="ctr">
+                      <a:solidFill>
+                        <a:srgbClr val="BFE0D8"/>
+                      </a:solidFill>
+                      <a:prstDash val="solid"/>
+                      <a:round/>
+                      <a:headEnd type="none" w="med" len="med"/>
+                      <a:tailEnd type="none" w="med" len="med"/>
+                    </a:lnB>
+                    <a:solidFill>
+                      <a:schemeClr val="bg2"/>
+                    </a:solidFill>
+                  </a:tcPr>
+                </a:tc>
+              </a:tr>
+              <a:tr h="0">
+                <a:tc>
+                  <a:txBody>
+                    <a:bodyPr/>
+                    <a:lstStyle/>
+                    <a:p>
+                      <a:pPr indent="0" marL="0">
+                        <a:buNone/>
+                      </a:pPr>
+                      <a:r>
+                        <a:rPr lang="en-US" sz="1350" b="1" dirty="0">
+                          <a:solidFill>
+                            <a:schemeClr val="accent2"/>
+                          </a:solidFill>
+                        </a:rPr>
+                        <a:t>HIGH</a:t>
+                      </a:r>
+                      <a:endParaRPr lang="en-US" sz="1350" dirty="0"/>
+                    </a:p>
+                  </a:txBody>
+                  <a:tcPr marL="76200" marR="76200" marT="50800" marB="50800" anchor="t">
+                    <a:lnL w="6350" cap="flat" cmpd="sng" algn="ctr">
+                      <a:solidFill>
+                        <a:srgbClr val="BFE0D8"/>
+                      </a:solidFill>
+                      <a:prstDash val="solid"/>
+                      <a:round/>
+                      <a:headEnd type="none" w="med" len="med"/>
+                      <a:tailEnd type="none" w="med" len="med"/>
+                    </a:lnL>
+                    <a:lnR w="6350" cap="flat" cmpd="sng" algn="ctr">
+                      <a:solidFill>
+                        <a:srgbClr val="BFE0D8"/>
+                      </a:solidFill>
+                      <a:prstDash val="solid"/>
+                      <a:round/>
+                      <a:headEnd type="none" w="med" len="med"/>
+                      <a:tailEnd type="none" w="med" len="med"/>
+                    </a:lnR>
+                    <a:lnT w="6350" cap="flat" cmpd="sng" algn="ctr">
+                      <a:solidFill>
+                        <a:srgbClr val="BFE0D8"/>
+                      </a:solidFill>
+                      <a:prstDash val="solid"/>
+                      <a:round/>
+                      <a:headEnd type="none" w="med" len="med"/>
+                      <a:tailEnd type="none" w="med" len="med"/>
+                    </a:lnT>
+                    <a:lnB w="6350" cap="flat" cmpd="sng" algn="ctr">
+                      <a:solidFill>
+                        <a:srgbClr val="BFE0D8"/>
+                      </a:solidFill>
+                      <a:prstDash val="solid"/>
+                      <a:round/>
+                      <a:headEnd type="none" w="med" len="med"/>
+                      <a:tailEnd type="none" w="med" len="med"/>
+                    </a:lnB>
+                    <a:solidFill>
+                      <a:schemeClr val="bg1"/>
+                    </a:solidFill>
+                  </a:tcPr>
+                </a:tc>
+                <a:tc>
+                  <a:txBody>
+                    <a:bodyPr/>
+                    <a:lstStyle/>
+                    <a:p>
+                      <a:pPr indent="0" marL="0">
+                        <a:buNone/>
+                      </a:pPr>
+                      <a:r>
+                        <a:rPr lang="en-US" sz="1350" b="1" dirty="0">
+                          <a:solidFill>
+                            <a:schemeClr val="tx1"/>
+                          </a:solidFill>
+                        </a:rPr>
+                        <a:t>The Phase 2 incentive and terms keep winners engaged</a:t>
+                      </a:r>
+                      <a:endParaRPr lang="en-US" sz="1350" dirty="0"/>
+                    </a:p>
+                  </a:txBody>
+                  <a:tcPr marL="76200" marR="76200" marT="50800" marB="50800" anchor="t">
+                    <a:lnL w="6350" cap="flat" cmpd="sng" algn="ctr">
+                      <a:solidFill>
+                        <a:srgbClr val="BFE0D8"/>
+                      </a:solidFill>
+                      <a:prstDash val="solid"/>
+                      <a:round/>
+                      <a:headEnd type="none" w="med" len="med"/>
+                      <a:tailEnd type="none" w="med" len="med"/>
+                    </a:lnL>
+                    <a:lnR w="6350" cap="flat" cmpd="sng" algn="ctr">
+                      <a:solidFill>
+                        <a:srgbClr val="BFE0D8"/>
+                      </a:solidFill>
+                      <a:prstDash val="solid"/>
+                      <a:round/>
+                      <a:headEnd type="none" w="med" len="med"/>
+                      <a:tailEnd type="none" w="med" len="med"/>
+                    </a:lnR>
+                    <a:lnT w="6350" cap="flat" cmpd="sng" algn="ctr">
+                      <a:solidFill>
+                        <a:srgbClr val="BFE0D8"/>
+                      </a:solidFill>
+                      <a:prstDash val="solid"/>
+                      <a:round/>
+                      <a:headEnd type="none" w="med" len="med"/>
+                      <a:tailEnd type="none" w="med" len="med"/>
+                    </a:lnT>
+                    <a:lnB w="6350" cap="flat" cmpd="sng" algn="ctr">
+                      <a:solidFill>
+                        <a:srgbClr val="BFE0D8"/>
+                      </a:solidFill>
+                      <a:prstDash val="solid"/>
+                      <a:round/>
+                      <a:headEnd type="none" w="med" len="med"/>
+                      <a:tailEnd type="none" w="med" len="med"/>
+                    </a:lnB>
+                    <a:solidFill>
+                      <a:schemeClr val="bg1"/>
+                    </a:solidFill>
+                  </a:tcPr>
+                </a:tc>
+                <a:tc>
+                  <a:txBody>
+                    <a:bodyPr/>
+                    <a:lstStyle/>
+                    <a:p>
+                      <a:pPr indent="0" marL="0">
+                        <a:buNone/>
+                      </a:pPr>
+                      <a:r>
+                        <a:rPr lang="en-US" sz="1350" dirty="0">
+                          <a:solidFill>
+                            <a:schemeClr val="tx1"/>
+                          </a:solidFill>
+                        </a:rPr>
+                        <a:t>The Phase 2 prize, payer and IP terms are undetermined</a:t>
+                      </a:r>
+                      <a:endParaRPr lang="en-US" sz="1350" dirty="0"/>
+                    </a:p>
+                  </a:txBody>
+                  <a:tcPr marL="76200" marR="76200" marT="50800" marB="50800" anchor="t">
+                    <a:lnL w="6350" cap="flat" cmpd="sng" algn="ctr">
+                      <a:solidFill>
+                        <a:srgbClr val="BFE0D8"/>
+                      </a:solidFill>
+                      <a:prstDash val="solid"/>
+                      <a:round/>
+                      <a:headEnd type="none" w="med" len="med"/>
+                      <a:tailEnd type="none" w="med" len="med"/>
+                    </a:lnL>
+                    <a:lnR w="6350" cap="flat" cmpd="sng" algn="ctr">
+                      <a:solidFill>
+                        <a:srgbClr val="BFE0D8"/>
+                      </a:solidFill>
+                      <a:prstDash val="solid"/>
+                      <a:round/>
+                      <a:headEnd type="none" w="med" len="med"/>
+                      <a:tailEnd type="none" w="med" len="med"/>
+                    </a:lnR>
+                    <a:lnT w="6350" cap="flat" cmpd="sng" algn="ctr">
+                      <a:solidFill>
+                        <a:srgbClr val="BFE0D8"/>
+                      </a:solidFill>
+                      <a:prstDash val="solid"/>
+                      <a:round/>
+                      <a:headEnd type="none" w="med" len="med"/>
+                      <a:tailEnd type="none" w="med" len="med"/>
+                    </a:lnT>
+                    <a:lnB w="6350" cap="flat" cmpd="sng" algn="ctr">
+                      <a:solidFill>
+                        <a:srgbClr val="BFE0D8"/>
+                      </a:solidFill>
+                      <a:prstDash val="solid"/>
+                      <a:round/>
+                      <a:headEnd type="none" w="med" len="med"/>
+                      <a:tailEnd type="none" w="med" len="med"/>
+                    </a:lnB>
+                    <a:solidFill>
+                      <a:schemeClr val="bg1"/>
+                    </a:solidFill>
+                  </a:tcPr>
+                </a:tc>
+                <a:tc>
+                  <a:txBody>
+                    <a:bodyPr/>
+                    <a:lstStyle/>
+                    <a:p>
+                      <a:pPr indent="0" marL="0">
+                        <a:buNone/>
+                      </a:pPr>
+                      <a:r>
+                        <a:rPr lang="en-US" sz="1350" dirty="0">
+                          <a:solidFill>
+                            <a:schemeClr val="tx1"/>
+                          </a:solidFill>
+                        </a:rPr>
+                        <a:t>NSF decides the Phase 2 prize; partner guidance on terms</a:t>
+                      </a:r>
+                      <a:endParaRPr lang="en-US" sz="1350" dirty="0"/>
+                    </a:p>
+                  </a:txBody>
+                  <a:tcPr marL="76200" marR="76200" marT="50800" marB="50800" anchor="t">
+                    <a:lnL w="6350" cap="flat" cmpd="sng" algn="ctr">
+                      <a:solidFill>
+                        <a:srgbClr val="BFE0D8"/>
+                      </a:solidFill>
+                      <a:prstDash val="solid"/>
+                      <a:round/>
+                      <a:headEnd type="none" w="med" len="med"/>
+                      <a:tailEnd type="none" w="med" len="med"/>
+                    </a:lnL>
+                    <a:lnR w="6350" cap="flat" cmpd="sng" algn="ctr">
+                      <a:solidFill>
+                        <a:srgbClr val="BFE0D8"/>
+                      </a:solidFill>
+                      <a:prstDash val="solid"/>
+                      <a:round/>
+                      <a:headEnd type="none" w="med" len="med"/>
+                      <a:tailEnd type="none" w="med" len="med"/>
+                    </a:lnR>
+                    <a:lnT w="6350" cap="flat" cmpd="sng" algn="ctr">
+                      <a:solidFill>
+                        <a:srgbClr val="BFE0D8"/>
+                      </a:solidFill>
+                      <a:prstDash val="solid"/>
+                      <a:round/>
+                      <a:headEnd type="none" w="med" len="med"/>
+                      <a:tailEnd type="none" w="med" len="med"/>
+                    </a:lnT>
+                    <a:lnB w="6350" cap="flat" cmpd="sng" algn="ctr">
+                      <a:solidFill>
+                        <a:srgbClr val="BFE0D8"/>
+                      </a:solidFill>
+                      <a:prstDash val="solid"/>
+                      <a:round/>
+                      <a:headEnd type="none" w="med" len="med"/>
+                      <a:tailEnd type="none" w="med" len="med"/>
+                    </a:lnB>
+                    <a:solidFill>
+                      <a:schemeClr val="bg1"/>
+                    </a:solidFill>
+                  </a:tcPr>
+                </a:tc>
+                <a:tc>
+                  <a:txBody>
+                    <a:bodyPr/>
+                    <a:lstStyle/>
+                    <a:p>
+                      <a:pPr indent="0" marL="0">
+                        <a:buNone/>
+                      </a:pPr>
+                      <a:r>
+                        <a:rPr lang="en-US" sz="1350" dirty="0">
+                          <a:solidFill>
+                            <a:schemeClr val="tx1"/>
+                          </a:solidFill>
+                        </a:rPr>
+                        <a:t>Before winners are announced</a:t>
+                      </a:r>
+                      <a:endParaRPr lang="en-US" sz="1350" dirty="0"/>
+                    </a:p>
+                  </a:txBody>
+                  <a:tcPr marL="76200" marR="76200" marT="50800" marB="50800" anchor="t">
+                    <a:lnL w="6350" cap="flat" cmpd="sng" algn="ctr">
+                      <a:solidFill>
+                        <a:srgbClr val="BFE0D8"/>
+                      </a:solidFill>
+                      <a:prstDash val="solid"/>
+                      <a:round/>
+                      <a:headEnd type="none" w="med" len="med"/>
+                      <a:tailEnd type="none" w="med" len="med"/>
+                    </a:lnL>
+                    <a:lnR w="6350" cap="flat" cmpd="sng" algn="ctr">
+                      <a:solidFill>
+                        <a:srgbClr val="BFE0D8"/>
+                      </a:solidFill>
+                      <a:prstDash val="solid"/>
+                      <a:round/>
+                      <a:headEnd type="none" w="med" len="med"/>
+                      <a:tailEnd type="none" w="med" len="med"/>
+                    </a:lnR>
+                    <a:lnT w="6350" cap="flat" cmpd="sng" algn="ctr">
+                      <a:solidFill>
+                        <a:srgbClr val="BFE0D8"/>
+                      </a:solidFill>
+                      <a:prstDash val="solid"/>
+                      <a:round/>
+                      <a:headEnd type="none" w="med" len="med"/>
+                      <a:tailEnd type="none" w="med" len="med"/>
+                    </a:lnT>
+                    <a:lnB w="6350" cap="flat" cmpd="sng" algn="ctr">
+                      <a:solidFill>
+                        <a:srgbClr val="BFE0D8"/>
+                      </a:solidFill>
+                      <a:prstDash val="solid"/>
+                      <a:round/>
+                      <a:headEnd type="none" w="med" len="med"/>
+                      <a:tailEnd type="none" w="med" len="med"/>
+                    </a:lnB>
+                    <a:solidFill>
+                      <a:schemeClr val="bg1"/>
+                    </a:solidFill>
+                  </a:tcPr>
+                </a:tc>
+                <a:tc>
+                  <a:txBody>
+                    <a:bodyPr/>
+                    <a:lstStyle/>
+                    <a:p>
+                      <a:pPr indent="0" marL="0">
+                        <a:buNone/>
+                      </a:pPr>
+                      <a:r>
+                        <a:rPr lang="en-US" sz="1350" dirty="0">
+                          <a:solidFill>
+                            <a:schemeClr val="tx1"/>
+                          </a:solidFill>
+                        </a:rPr>
+                        <a:t>NSF decision</a:t>
+                      </a:r>
+                      <a:endParaRPr lang="en-US" sz="1350" dirty="0"/>
+                    </a:p>
+                  </a:txBody>
+                  <a:tcPr marL="76200" marR="76200" marT="50800" marB="50800" anchor="t">
+                    <a:lnL w="6350" cap="flat" cmpd="sng" algn="ctr">
+                      <a:solidFill>
+                        <a:srgbClr val="BFE0D8"/>
+                      </a:solidFill>
+                      <a:prstDash val="solid"/>
+                      <a:round/>
+                      <a:headEnd type="none" w="med" len="med"/>
+                      <a:tailEnd type="none" w="med" len="med"/>
+                    </a:lnL>
+                    <a:lnR w="6350" cap="flat" cmpd="sng" algn="ctr">
+                      <a:solidFill>
+                        <a:srgbClr val="BFE0D8"/>
+                      </a:solidFill>
+                      <a:prstDash val="solid"/>
+                      <a:round/>
+                      <a:headEnd type="none" w="med" len="med"/>
+                      <a:tailEnd type="none" w="med" len="med"/>
+                    </a:lnR>
+                    <a:lnT w="6350" cap="flat" cmpd="sng" algn="ctr">
+                      <a:solidFill>
+                        <a:srgbClr val="BFE0D8"/>
+                      </a:solidFill>
+                      <a:prstDash val="solid"/>
+                      <a:round/>
+                      <a:headEnd type="none" w="med" len="med"/>
+                      <a:tailEnd type="none" w="med" len="med"/>
+                    </a:lnT>
+                    <a:lnB w="6350" cap="flat" cmpd="sng" algn="ctr">
+                      <a:solidFill>
+                        <a:srgbClr val="BFE0D8"/>
+                      </a:solidFill>
+                      <a:prstDash val="solid"/>
+                      <a:round/>
+                      <a:headEnd type="none" w="med" len="med"/>
+                      <a:tailEnd type="none" w="med" len="med"/>
+                    </a:lnB>
+                    <a:solidFill>
+                      <a:schemeClr val="bg1"/>
+                    </a:solidFill>
+                  </a:tcPr>
+                </a:tc>
+              </a:tr>
+              <a:tr h="0">
+                <a:tc>
+                  <a:txBody>
+                    <a:bodyPr/>
+                    <a:lstStyle/>
+                    <a:p>
+                      <a:pPr indent="0" marL="0">
+                        <a:buNone/>
+                      </a:pPr>
+                      <a:r>
+                        <a:rPr lang="en-US" sz="1350" b="1" dirty="0">
+                          <a:solidFill>
+                            <a:schemeClr val="accent3"/>
+                          </a:solidFill>
+                        </a:rPr>
+                        <a:t>MEDIUM</a:t>
+                      </a:r>
+                      <a:endParaRPr lang="en-US" sz="1350" dirty="0"/>
+                    </a:p>
+                  </a:txBody>
+                  <a:tcPr marL="76200" marR="76200" marT="50800" marB="50800" anchor="t">
+                    <a:lnL w="6350" cap="flat" cmpd="sng" algn="ctr">
+                      <a:solidFill>
+                        <a:srgbClr val="BFE0D8"/>
+                      </a:solidFill>
+                      <a:prstDash val="solid"/>
+                      <a:round/>
+                      <a:headEnd type="none" w="med" len="med"/>
+                      <a:tailEnd type="none" w="med" len="med"/>
+                    </a:lnL>
+                    <a:lnR w="6350" cap="flat" cmpd="sng" algn="ctr">
+                      <a:solidFill>
+                        <a:srgbClr val="BFE0D8"/>
+                      </a:solidFill>
+                      <a:prstDash val="solid"/>
+                      <a:round/>
+                      <a:headEnd type="none" w="med" len="med"/>
+                      <a:tailEnd type="none" w="med" len="med"/>
+                    </a:lnR>
+                    <a:lnT w="6350" cap="flat" cmpd="sng" algn="ctr">
+                      <a:solidFill>
+                        <a:srgbClr val="BFE0D8"/>
+                      </a:solidFill>
+                      <a:prstDash val="solid"/>
+                      <a:round/>
+                      <a:headEnd type="none" w="med" len="med"/>
+                      <a:tailEnd type="none" w="med" len="med"/>
+                    </a:lnT>
+                    <a:lnB w="6350" cap="flat" cmpd="sng" algn="ctr">
+                      <a:solidFill>
+                        <a:srgbClr val="BFE0D8"/>
+                      </a:solidFill>
+                      <a:prstDash val="solid"/>
+                      <a:round/>
+                      <a:headEnd type="none" w="med" len="med"/>
+                      <a:tailEnd type="none" w="med" len="med"/>
+                    </a:lnB>
+                    <a:solidFill>
+                      <a:schemeClr val="bg2"/>
+                    </a:solidFill>
+                  </a:tcPr>
+                </a:tc>
+                <a:tc>
+                  <a:txBody>
+                    <a:bodyPr/>
+                    <a:lstStyle/>
+                    <a:p>
+                      <a:pPr indent="0" marL="0">
+                        <a:buNone/>
+                      </a:pPr>
+                      <a:r>
+                        <a:rPr lang="en-US" sz="1350" b="1" dirty="0">
+                          <a:solidFill>
+                            <a:schemeClr val="tx1"/>
+                          </a:solidFill>
+                        </a:rPr>
+                        <a:t>Enough qualified, diverse teams enter</a:t>
+                      </a:r>
+                      <a:endParaRPr lang="en-US" sz="1350" dirty="0"/>
+                    </a:p>
+                  </a:txBody>
+                  <a:tcPr marL="76200" marR="76200" marT="50800" marB="50800" anchor="t">
+                    <a:lnL w="6350" cap="flat" cmpd="sng" algn="ctr">
+                      <a:solidFill>
+                        <a:srgbClr val="BFE0D8"/>
+                      </a:solidFill>
+                      <a:prstDash val="solid"/>
+                      <a:round/>
+                      <a:headEnd type="none" w="med" len="med"/>
+                      <a:tailEnd type="none" w="med" len="med"/>
+                    </a:lnL>
+                    <a:lnR w="6350" cap="flat" cmpd="sng" algn="ctr">
+                      <a:solidFill>
+                        <a:srgbClr val="BFE0D8"/>
+                      </a:solidFill>
+                      <a:prstDash val="solid"/>
+                      <a:round/>
+                      <a:headEnd type="none" w="med" len="med"/>
+                      <a:tailEnd type="none" w="med" len="med"/>
+                    </a:lnR>
+                    <a:lnT w="6350" cap="flat" cmpd="sng" algn="ctr">
+                      <a:solidFill>
+                        <a:srgbClr val="BFE0D8"/>
+                      </a:solidFill>
+                      <a:prstDash val="solid"/>
+                      <a:round/>
+                      <a:headEnd type="none" w="med" len="med"/>
+                      <a:tailEnd type="none" w="med" len="med"/>
+                    </a:lnT>
+                    <a:lnB w="6350" cap="flat" cmpd="sng" algn="ctr">
+                      <a:solidFill>
+                        <a:srgbClr val="BFE0D8"/>
+                      </a:solidFill>
+                      <a:prstDash val="solid"/>
+                      <a:round/>
+                      <a:headEnd type="none" w="med" len="med"/>
+                      <a:tailEnd type="none" w="med" len="med"/>
+                    </a:lnB>
+                    <a:solidFill>
+                      <a:schemeClr val="bg2"/>
+                    </a:solidFill>
+                  </a:tcPr>
+                </a:tc>
+                <a:tc>
+                  <a:txBody>
+                    <a:bodyPr/>
+                    <a:lstStyle/>
+                    <a:p>
+                      <a:pPr indent="0" marL="0">
+                        <a:buNone/>
+                      </a:pPr>
+                      <a:r>
+                        <a:rPr lang="en-US" sz="1350" dirty="0">
+                          <a:solidFill>
+                            <a:schemeClr val="tx1"/>
+                          </a:solidFill>
+                        </a:rPr>
+                        <a:t>Quantum skills barrier, NSF-format documents, holiday launch</a:t>
+                      </a:r>
+                      <a:endParaRPr lang="en-US" sz="1350" dirty="0"/>
+                    </a:p>
+                  </a:txBody>
+                  <a:tcPr marL="76200" marR="76200" marT="50800" marB="50800" anchor="t">
+                    <a:lnL w="6350" cap="flat" cmpd="sng" algn="ctr">
+                      <a:solidFill>
+                        <a:srgbClr val="BFE0D8"/>
+                      </a:solidFill>
+                      <a:prstDash val="solid"/>
+                      <a:round/>
+                      <a:headEnd type="none" w="med" len="med"/>
+                      <a:tailEnd type="none" w="med" len="med"/>
+                    </a:lnL>
+                    <a:lnR w="6350" cap="flat" cmpd="sng" algn="ctr">
+                      <a:solidFill>
+                        <a:srgbClr val="BFE0D8"/>
+                      </a:solidFill>
+                      <a:prstDash val="solid"/>
+                      <a:round/>
+                      <a:headEnd type="none" w="med" len="med"/>
+                      <a:tailEnd type="none" w="med" len="med"/>
+                    </a:lnR>
+                    <a:lnT w="6350" cap="flat" cmpd="sng" algn="ctr">
+                      <a:solidFill>
+                        <a:srgbClr val="BFE0D8"/>
+                      </a:solidFill>
+                      <a:prstDash val="solid"/>
+                      <a:round/>
+                      <a:headEnd type="none" w="med" len="med"/>
+                      <a:tailEnd type="none" w="med" len="med"/>
+                    </a:lnT>
+                    <a:lnB w="6350" cap="flat" cmpd="sng" algn="ctr">
+                      <a:solidFill>
+                        <a:srgbClr val="BFE0D8"/>
+                      </a:solidFill>
+                      <a:prstDash val="solid"/>
+                      <a:round/>
+                      <a:headEnd type="none" w="med" len="med"/>
+                      <a:tailEnd type="none" w="med" len="med"/>
+                    </a:lnB>
+                    <a:solidFill>
+                      <a:schemeClr val="bg2"/>
+                    </a:solidFill>
+                  </a:tcPr>
+                </a:tc>
+                <a:tc>
+                  <a:txBody>
+                    <a:bodyPr/>
+                    <a:lstStyle/>
+                    <a:p>
+                      <a:pPr indent="0" marL="0">
+                        <a:buNone/>
+                      </a:pPr>
+                      <a:r>
+                        <a:rPr lang="en-US" sz="1350" dirty="0">
+                          <a:solidFill>
+                            <a:schemeClr val="tx1"/>
+                          </a:solidFill>
+                        </a:rPr>
+                        <a:t>Monthly registrant-quality report; EPSCoR share; January push</a:t>
+                      </a:r>
+                      <a:endParaRPr lang="en-US" sz="1350" dirty="0"/>
+                    </a:p>
+                  </a:txBody>
+                  <a:tcPr marL="76200" marR="76200" marT="50800" marB="50800" anchor="t">
+                    <a:lnL w="6350" cap="flat" cmpd="sng" algn="ctr">
+                      <a:solidFill>
+                        <a:srgbClr val="BFE0D8"/>
+                      </a:solidFill>
+                      <a:prstDash val="solid"/>
+                      <a:round/>
+                      <a:headEnd type="none" w="med" len="med"/>
+                      <a:tailEnd type="none" w="med" len="med"/>
+                    </a:lnL>
+                    <a:lnR w="6350" cap="flat" cmpd="sng" algn="ctr">
+                      <a:solidFill>
+                        <a:srgbClr val="BFE0D8"/>
+                      </a:solidFill>
+                      <a:prstDash val="solid"/>
+                      <a:round/>
+                      <a:headEnd type="none" w="med" len="med"/>
+                      <a:tailEnd type="none" w="med" len="med"/>
+                    </a:lnR>
+                    <a:lnT w="6350" cap="flat" cmpd="sng" algn="ctr">
+                      <a:solidFill>
+                        <a:srgbClr val="BFE0D8"/>
+                      </a:solidFill>
+                      <a:prstDash val="solid"/>
+                      <a:round/>
+                      <a:headEnd type="none" w="med" len="med"/>
+                      <a:tailEnd type="none" w="med" len="med"/>
+                    </a:lnT>
+                    <a:lnB w="6350" cap="flat" cmpd="sng" algn="ctr">
+                      <a:solidFill>
+                        <a:srgbClr val="BFE0D8"/>
+                      </a:solidFill>
+                      <a:prstDash val="solid"/>
+                      <a:round/>
+                      <a:headEnd type="none" w="med" len="med"/>
+                      <a:tailEnd type="none" w="med" len="med"/>
+                    </a:lnB>
+                    <a:solidFill>
+                      <a:schemeClr val="bg2"/>
+                    </a:solidFill>
+                  </a:tcPr>
+                </a:tc>
+                <a:tc>
+                  <a:txBody>
+                    <a:bodyPr/>
+                    <a:lstStyle/>
+                    <a:p>
+                      <a:pPr indent="0" marL="0">
+                        <a:buNone/>
+                      </a:pPr>
+                      <a:r>
+                        <a:rPr lang="en-US" sz="1350" dirty="0">
+                          <a:solidFill>
+                            <a:schemeClr val="tx1"/>
+                          </a:solidFill>
+                        </a:rPr>
+                        <a:t>Jan–Mar 2027</a:t>
+                      </a:r>
+                      <a:endParaRPr lang="en-US" sz="1350" dirty="0"/>
+                    </a:p>
+                  </a:txBody>
+                  <a:tcPr marL="76200" marR="76200" marT="50800" marB="50800" anchor="t">
+                    <a:lnL w="6350" cap="flat" cmpd="sng" algn="ctr">
+                      <a:solidFill>
+                        <a:srgbClr val="BFE0D8"/>
+                      </a:solidFill>
+                      <a:prstDash val="solid"/>
+                      <a:round/>
+                      <a:headEnd type="none" w="med" len="med"/>
+                      <a:tailEnd type="none" w="med" len="med"/>
+                    </a:lnL>
+                    <a:lnR w="6350" cap="flat" cmpd="sng" algn="ctr">
+                      <a:solidFill>
+                        <a:srgbClr val="BFE0D8"/>
+                      </a:solidFill>
+                      <a:prstDash val="solid"/>
+                      <a:round/>
+                      <a:headEnd type="none" w="med" len="med"/>
+                      <a:tailEnd type="none" w="med" len="med"/>
+                    </a:lnR>
+                    <a:lnT w="6350" cap="flat" cmpd="sng" algn="ctr">
+                      <a:solidFill>
+                        <a:srgbClr val="BFE0D8"/>
+                      </a:solidFill>
+                      <a:prstDash val="solid"/>
+                      <a:round/>
+                      <a:headEnd type="none" w="med" len="med"/>
+                      <a:tailEnd type="none" w="med" len="med"/>
+                    </a:lnT>
+                    <a:lnB w="6350" cap="flat" cmpd="sng" algn="ctr">
+                      <a:solidFill>
+                        <a:srgbClr val="BFE0D8"/>
+                      </a:solidFill>
+                      <a:prstDash val="solid"/>
+                      <a:round/>
+                      <a:headEnd type="none" w="med" len="med"/>
+                      <a:tailEnd type="none" w="med" len="med"/>
+                    </a:lnB>
+                    <a:solidFill>
+                      <a:schemeClr val="bg2"/>
+                    </a:solidFill>
+                  </a:tcPr>
+                </a:tc>
+                <a:tc>
+                  <a:txBody>
+                    <a:bodyPr/>
+                    <a:lstStyle/>
+                    <a:p>
+                      <a:pPr indent="0" marL="0">
+                        <a:buNone/>
+                      </a:pPr>
+                      <a:r>
+                        <a:rPr lang="en-US" sz="1350" dirty="0">
+                          <a:solidFill>
+                            <a:schemeClr val="tx1"/>
+                          </a:solidFill>
+                        </a:rPr>
+                        <a:t>Outreach</a:t>
+                      </a:r>
+                      <a:endParaRPr lang="en-US" sz="1350" dirty="0"/>
+                    </a:p>
+                  </a:txBody>
+                  <a:tcPr marL="76200" marR="76200" marT="50800" marB="50800" anchor="t">
+                    <a:lnL w="6350" cap="flat" cmpd="sng" algn="ctr">
+                      <a:solidFill>
+                        <a:srgbClr val="BFE0D8"/>
+                      </a:solidFill>
+                      <a:prstDash val="solid"/>
+                      <a:round/>
+                      <a:headEnd type="none" w="med" len="med"/>
+                      <a:tailEnd type="none" w="med" len="med"/>
+                    </a:lnL>
+                    <a:lnR w="6350" cap="flat" cmpd="sng" algn="ctr">
+                      <a:solidFill>
+                        <a:srgbClr val="BFE0D8"/>
+                      </a:solidFill>
+                      <a:prstDash val="solid"/>
+                      <a:round/>
+                      <a:headEnd type="none" w="med" len="med"/>
+                      <a:tailEnd type="none" w="med" len="med"/>
+                    </a:lnR>
+                    <a:lnT w="6350" cap="flat" cmpd="sng" algn="ctr">
+                      <a:solidFill>
+                        <a:srgbClr val="BFE0D8"/>
+                      </a:solidFill>
+                      <a:prstDash val="solid"/>
+                      <a:round/>
+                      <a:headEnd type="none" w="med" len="med"/>
+                      <a:tailEnd type="none" w="med" len="med"/>
+                    </a:lnT>
+                    <a:lnB w="6350" cap="flat" cmpd="sng" algn="ctr">
+                      <a:solidFill>
+                        <a:srgbClr val="BFE0D8"/>
+                      </a:solidFill>
+                      <a:prstDash val="solid"/>
+                      <a:round/>
+                      <a:headEnd type="none" w="med" len="med"/>
+                      <a:tailEnd type="none" w="med" len="med"/>
+                    </a:lnB>
+                    <a:solidFill>
+                      <a:schemeClr val="bg2"/>
+                    </a:solidFill>
+                  </a:tcPr>
+                </a:tc>
+              </a:tr>
+              <a:tr h="0">
+                <a:tc>
+                  <a:txBody>
+                    <a:bodyPr/>
+                    <a:lstStyle/>
+                    <a:p>
+                      <a:pPr indent="0" marL="0">
+                        <a:buNone/>
+                      </a:pPr>
+                      <a:r>
+                        <a:rPr lang="en-US" sz="1350" b="1" dirty="0">
+                          <a:solidFill>
+                            <a:schemeClr val="accent5"/>
+                          </a:solidFill>
+                        </a:rPr>
+                        <a:t>WATCH</a:t>
+                      </a:r>
+                      <a:endParaRPr lang="en-US" sz="1350" dirty="0"/>
+                    </a:p>
+                  </a:txBody>
+                  <a:tcPr marL="76200" marR="76200" marT="50800" marB="50800" anchor="t">
+                    <a:lnL w="6350" cap="flat" cmpd="sng" algn="ctr">
+                      <a:solidFill>
+                        <a:srgbClr val="BFE0D8"/>
+                      </a:solidFill>
+                      <a:prstDash val="solid"/>
+                      <a:round/>
+                      <a:headEnd type="none" w="med" len="med"/>
+                      <a:tailEnd type="none" w="med" len="med"/>
+                    </a:lnL>
+                    <a:lnR w="6350" cap="flat" cmpd="sng" algn="ctr">
+                      <a:solidFill>
+                        <a:srgbClr val="BFE0D8"/>
+                      </a:solidFill>
+                      <a:prstDash val="solid"/>
+                      <a:round/>
+                      <a:headEnd type="none" w="med" len="med"/>
+                      <a:tailEnd type="none" w="med" len="med"/>
+                    </a:lnR>
+                    <a:lnT w="6350" cap="flat" cmpd="sng" algn="ctr">
+                      <a:solidFill>
+                        <a:srgbClr val="BFE0D8"/>
+                      </a:solidFill>
+                      <a:prstDash val="solid"/>
+                      <a:round/>
+                      <a:headEnd type="none" w="med" len="med"/>
+                      <a:tailEnd type="none" w="med" len="med"/>
+                    </a:lnT>
+                    <a:lnB w="6350" cap="flat" cmpd="sng" algn="ctr">
+                      <a:solidFill>
+                        <a:srgbClr val="BFE0D8"/>
+                      </a:solidFill>
+                      <a:prstDash val="solid"/>
+                      <a:round/>
+                      <a:headEnd type="none" w="med" len="med"/>
+                      <a:tailEnd type="none" w="med" len="med"/>
+                    </a:lnB>
+                    <a:solidFill>
+                      <a:schemeClr val="bg1"/>
+                    </a:solidFill>
+                  </a:tcPr>
+                </a:tc>
+                <a:tc>
+                  <a:txBody>
+                    <a:bodyPr/>
+                    <a:lstStyle/>
+                    <a:p>
+                      <a:pPr indent="0" marL="0">
+                        <a:buNone/>
+                      </a:pPr>
+                      <a:r>
+                        <a:rPr lang="en-US" sz="1350" b="1" dirty="0">
+                          <a:solidFill>
+                            <a:schemeClr val="tx1"/>
+                          </a:solidFill>
+                        </a:rPr>
+                        <a:t>Hardware matures in time for Phase 3</a:t>
+                      </a:r>
+                      <a:endParaRPr lang="en-US" sz="1350" dirty="0"/>
+                    </a:p>
+                  </a:txBody>
+                  <a:tcPr marL="76200" marR="76200" marT="50800" marB="50800" anchor="t">
+                    <a:lnL w="6350" cap="flat" cmpd="sng" algn="ctr">
+                      <a:solidFill>
+                        <a:srgbClr val="BFE0D8"/>
+                      </a:solidFill>
+                      <a:prstDash val="solid"/>
+                      <a:round/>
+                      <a:headEnd type="none" w="med" len="med"/>
+                      <a:tailEnd type="none" w="med" len="med"/>
+                    </a:lnL>
+                    <a:lnR w="6350" cap="flat" cmpd="sng" algn="ctr">
+                      <a:solidFill>
+                        <a:srgbClr val="BFE0D8"/>
+                      </a:solidFill>
+                      <a:prstDash val="solid"/>
+                      <a:round/>
+                      <a:headEnd type="none" w="med" len="med"/>
+                      <a:tailEnd type="none" w="med" len="med"/>
+                    </a:lnR>
+                    <a:lnT w="6350" cap="flat" cmpd="sng" algn="ctr">
+                      <a:solidFill>
+                        <a:srgbClr val="BFE0D8"/>
+                      </a:solidFill>
+                      <a:prstDash val="solid"/>
+                      <a:round/>
+                      <a:headEnd type="none" w="med" len="med"/>
+                      <a:tailEnd type="none" w="med" len="med"/>
+                    </a:lnT>
+                    <a:lnB w="6350" cap="flat" cmpd="sng" algn="ctr">
+                      <a:solidFill>
+                        <a:srgbClr val="BFE0D8"/>
+                      </a:solidFill>
+                      <a:prstDash val="solid"/>
+                      <a:round/>
+                      <a:headEnd type="none" w="med" len="med"/>
+                      <a:tailEnd type="none" w="med" len="med"/>
+                    </a:lnB>
+                    <a:solidFill>
+                      <a:schemeClr val="bg1"/>
+                    </a:solidFill>
+                  </a:tcPr>
+                </a:tc>
+                <a:tc>
+                  <a:txBody>
+                    <a:bodyPr/>
+                    <a:lstStyle/>
+                    <a:p>
+                      <a:pPr indent="0" marL="0">
+                        <a:buNone/>
+                      </a:pPr>
+                      <a:r>
+                        <a:rPr lang="en-US" sz="1350" dirty="0">
+                          <a:solidFill>
+                            <a:schemeClr val="tx1"/>
+                          </a:solidFill>
+                        </a:rPr>
+                        <a:t>Outside the challenge's control</a:t>
+                      </a:r>
+                      <a:endParaRPr lang="en-US" sz="1350" dirty="0"/>
+                    </a:p>
+                  </a:txBody>
+                  <a:tcPr marL="76200" marR="76200" marT="50800" marB="50800" anchor="t">
+                    <a:lnL w="6350" cap="flat" cmpd="sng" algn="ctr">
+                      <a:solidFill>
+                        <a:srgbClr val="BFE0D8"/>
+                      </a:solidFill>
+                      <a:prstDash val="solid"/>
+                      <a:round/>
+                      <a:headEnd type="none" w="med" len="med"/>
+                      <a:tailEnd type="none" w="med" len="med"/>
+                    </a:lnL>
+                    <a:lnR w="6350" cap="flat" cmpd="sng" algn="ctr">
+                      <a:solidFill>
+                        <a:srgbClr val="BFE0D8"/>
+                      </a:solidFill>
+                      <a:prstDash val="solid"/>
+                      <a:round/>
+                      <a:headEnd type="none" w="med" len="med"/>
+                      <a:tailEnd type="none" w="med" len="med"/>
+                    </a:lnR>
+                    <a:lnT w="6350" cap="flat" cmpd="sng" algn="ctr">
+                      <a:solidFill>
+                        <a:srgbClr val="BFE0D8"/>
+                      </a:solidFill>
+                      <a:prstDash val="solid"/>
+                      <a:round/>
+                      <a:headEnd type="none" w="med" len="med"/>
+                      <a:tailEnd type="none" w="med" len="med"/>
+                    </a:lnT>
+                    <a:lnB w="6350" cap="flat" cmpd="sng" algn="ctr">
+                      <a:solidFill>
+                        <a:srgbClr val="BFE0D8"/>
+                      </a:solidFill>
+                      <a:prstDash val="solid"/>
+                      <a:round/>
+                      <a:headEnd type="none" w="med" len="med"/>
+                      <a:tailEnd type="none" w="med" len="med"/>
+                    </a:lnB>
+                    <a:solidFill>
+                      <a:schemeClr val="bg1"/>
+                    </a:solidFill>
+                  </a:tcPr>
+                </a:tc>
+                <a:tc>
+                  <a:txBody>
+                    <a:bodyPr/>
+                    <a:lstStyle/>
+                    <a:p>
+                      <a:pPr indent="0" marL="0">
+                        <a:buNone/>
+                      </a:pPr>
+                      <a:r>
+                        <a:rPr lang="en-US" sz="1350" dirty="0">
+                          <a:solidFill>
+                            <a:schemeClr val="tx1"/>
+                          </a:solidFill>
+                        </a:rPr>
+                        <a:t>Require resource estimates; hardware not required in Phase 1</a:t>
+                      </a:r>
+                      <a:endParaRPr lang="en-US" sz="1350" dirty="0"/>
+                    </a:p>
+                  </a:txBody>
+                  <a:tcPr marL="76200" marR="76200" marT="50800" marB="50800" anchor="t">
+                    <a:lnL w="6350" cap="flat" cmpd="sng" algn="ctr">
+                      <a:solidFill>
+                        <a:srgbClr val="BFE0D8"/>
+                      </a:solidFill>
+                      <a:prstDash val="solid"/>
+                      <a:round/>
+                      <a:headEnd type="none" w="med" len="med"/>
+                      <a:tailEnd type="none" w="med" len="med"/>
+                    </a:lnL>
+                    <a:lnR w="6350" cap="flat" cmpd="sng" algn="ctr">
+                      <a:solidFill>
+                        <a:srgbClr val="BFE0D8"/>
+                      </a:solidFill>
+                      <a:prstDash val="solid"/>
+                      <a:round/>
+                      <a:headEnd type="none" w="med" len="med"/>
+                      <a:tailEnd type="none" w="med" len="med"/>
+                    </a:lnR>
+                    <a:lnT w="6350" cap="flat" cmpd="sng" algn="ctr">
+                      <a:solidFill>
+                        <a:srgbClr val="BFE0D8"/>
+                      </a:solidFill>
+                      <a:prstDash val="solid"/>
+                      <a:round/>
+                      <a:headEnd type="none" w="med" len="med"/>
+                      <a:tailEnd type="none" w="med" len="med"/>
+                    </a:lnT>
+                    <a:lnB w="6350" cap="flat" cmpd="sng" algn="ctr">
+                      <a:solidFill>
+                        <a:srgbClr val="BFE0D8"/>
+                      </a:solidFill>
+                      <a:prstDash val="solid"/>
+                      <a:round/>
+                      <a:headEnd type="none" w="med" len="med"/>
+                      <a:tailEnd type="none" w="med" len="med"/>
+                    </a:lnB>
+                    <a:solidFill>
+                      <a:schemeClr val="bg1"/>
+                    </a:solidFill>
+                  </a:tcPr>
+                </a:tc>
+                <a:tc>
+                  <a:txBody>
+                    <a:bodyPr/>
+                    <a:lstStyle/>
+                    <a:p>
+                      <a:pPr indent="0" marL="0">
+                        <a:buNone/>
+                      </a:pPr>
+                      <a:r>
+                        <a:rPr lang="en-US" sz="1350" dirty="0">
+                          <a:solidFill>
+                            <a:schemeClr val="tx1"/>
+                          </a:solidFill>
+                        </a:rPr>
+                        <a:t>Ongoing</a:t>
+                      </a:r>
+                      <a:endParaRPr lang="en-US" sz="1350" dirty="0"/>
+                    </a:p>
+                  </a:txBody>
+                  <a:tcPr marL="76200" marR="76200" marT="50800" marB="50800" anchor="t">
+                    <a:lnL w="6350" cap="flat" cmpd="sng" algn="ctr">
+                      <a:solidFill>
+                        <a:srgbClr val="BFE0D8"/>
+                      </a:solidFill>
+                      <a:prstDash val="solid"/>
+                      <a:round/>
+                      <a:headEnd type="none" w="med" len="med"/>
+                      <a:tailEnd type="none" w="med" len="med"/>
+                    </a:lnL>
+                    <a:lnR w="6350" cap="flat" cmpd="sng" algn="ctr">
+                      <a:solidFill>
+                        <a:srgbClr val="BFE0D8"/>
+                      </a:solidFill>
+                      <a:prstDash val="solid"/>
+                      <a:round/>
+                      <a:headEnd type="none" w="med" len="med"/>
+                      <a:tailEnd type="none" w="med" len="med"/>
+                    </a:lnR>
+                    <a:lnT w="6350" cap="flat" cmpd="sng" algn="ctr">
+                      <a:solidFill>
+                        <a:srgbClr val="BFE0D8"/>
+                      </a:solidFill>
+                      <a:prstDash val="solid"/>
+                      <a:round/>
+                      <a:headEnd type="none" w="med" len="med"/>
+                      <a:tailEnd type="none" w="med" len="med"/>
+                    </a:lnT>
+                    <a:lnB w="6350" cap="flat" cmpd="sng" algn="ctr">
+                      <a:solidFill>
+                        <a:srgbClr val="BFE0D8"/>
+                      </a:solidFill>
+                      <a:prstDash val="solid"/>
+                      <a:round/>
+                      <a:headEnd type="none" w="med" len="med"/>
+                      <a:tailEnd type="none" w="med" len="med"/>
+                    </a:lnB>
+                    <a:solidFill>
+                      <a:schemeClr val="bg1"/>
+                    </a:solidFill>
+                  </a:tcPr>
+                </a:tc>
+                <a:tc>
+                  <a:txBody>
+                    <a:bodyPr/>
+                    <a:lstStyle/>
+                    <a:p>
+                      <a:pPr indent="0" marL="0">
+                        <a:buNone/>
+                      </a:pPr>
+                      <a:r>
+                        <a:rPr lang="en-US" sz="1350" dirty="0">
+                          <a:solidFill>
+                            <a:schemeClr val="tx1"/>
+                          </a:solidFill>
+                        </a:rPr>
+                        <a:t>—</a:t>
+                      </a:r>
+                      <a:endParaRPr lang="en-US" sz="1350" dirty="0"/>
+                    </a:p>
+                  </a:txBody>
+                  <a:tcPr marL="76200" marR="76200" marT="50800" marB="50800" anchor="t">
+                    <a:lnL w="6350" cap="flat" cmpd="sng" algn="ctr">
+                      <a:solidFill>
+                        <a:srgbClr val="BFE0D8"/>
+                      </a:solidFill>
+                      <a:prstDash val="solid"/>
+                      <a:round/>
+                      <a:headEnd type="none" w="med" len="med"/>
+                      <a:tailEnd type="none" w="med" len="med"/>
+                    </a:lnL>
+                    <a:lnR w="6350" cap="flat" cmpd="sng" algn="ctr">
+                      <a:solidFill>
+                        <a:srgbClr val="BFE0D8"/>
+                      </a:solidFill>
+                      <a:prstDash val="solid"/>
+                      <a:round/>
+                      <a:headEnd type="none" w="med" len="med"/>
+                      <a:tailEnd type="none" w="med" len="med"/>
+                    </a:lnR>
+                    <a:lnT w="6350" cap="flat" cmpd="sng" algn="ctr">
+                      <a:solidFill>
+                        <a:srgbClr val="BFE0D8"/>
+                      </a:solidFill>
+                      <a:prstDash val="solid"/>
+                      <a:round/>
+                      <a:headEnd type="none" w="med" len="med"/>
+                      <a:tailEnd type="none" w="med" len="med"/>
+                    </a:lnT>
+                    <a:lnB w="6350" cap="flat" cmpd="sng" algn="ctr">
+                      <a:solidFill>
+                        <a:srgbClr val="BFE0D8"/>
+                      </a:solidFill>
+                      <a:prstDash val="solid"/>
+                      <a:round/>
+                      <a:headEnd type="none" w="med" len="med"/>
+                      <a:tailEnd type="none" w="med" len="med"/>
+                    </a:lnB>
+                    <a:solidFill>
+                      <a:schemeClr val="bg1"/>
+                    </a:solidFill>
+                  </a:tcPr>
+                </a:tc>
+              </a:tr>
+            </a:tbl>
+          </a:graphicData>
+        </a:graphic>
+      </p:graphicFrame>
+      <p:sp>
+        <p:nvSpPr>
+          <p:cNvPr id="4" name="logframe-takeaway"/>
+          <p:cNvSpPr/>
+          <p:nvPr/>
+        </p:nvSpPr>
+        <p:spPr>
+          <a:xfrm>
+            <a:off x="548640" y="4846320"/>
+            <a:ext cx="11064240" cy="960120"/>
+          </a:xfrm>
+          <a:prstGeom prst="roundRect">
+            <a:avLst>
+              <a:gd name="adj" fmla="val 7619"/>
+            </a:avLst>
+          </a:prstGeom>
+          <a:solidFill>
+            <a:schemeClr val="tx2"/>
+          </a:solidFill>
+          <a:ln w="9525">
+            <a:solidFill>
+              <a:schemeClr val="tx2"/>
+            </a:solidFill>
+            <a:prstDash val="solid"/>
+          </a:ln>
+        </p:spPr>
+      </p:sp>
+      <p:sp>
+        <p:nvSpPr>
+          <p:cNvPr id="5" name="Text 2"/>
+          <p:cNvSpPr txBox="1"/>
+          <p:nvPr/>
+        </p:nvSpPr>
+        <p:spPr>
+          <a:xfrm>
+            <a:off x="777240" y="4919472"/>
+            <a:ext cx="10607040" cy="822960"/>
+          </a:xfrm>
+          <a:prstGeom prst="rect">
+            <a:avLst/>
+          </a:prstGeom>
+          <a:noFill/>
+          <a:ln/>
+        </p:spPr>
+        <p:txBody>
+          <a:bodyPr wrap="square" lIns="0" tIns="0" rIns="0" bIns="0" rtlCol="0" anchor="ctr"/>
+          <a:lstStyle/>
+          <a:p>
+            <a:pPr indent="0" marL="0">
+              <a:buNone/>
+            </a:pPr>
+            <a:r>
+              <a:rPr lang="en-US" sz="1350" b="1" dirty="0">
+                <a:solidFill>
+                  <a:schemeClr val="accent4"/>
+                </a:solidFill>
+              </a:rPr>
+              <a:t>The takeaway: </a:t>
+            </a:r>
+            <a:pPr indent="0" marL="0">
+              <a:buNone/>
+            </a:pPr>
+            <a:r>
+              <a:rPr lang="en-US" sz="1350" dirty="0">
+                <a:solidFill>
+                  <a:schemeClr val="bg1"/>
+                </a:solidFill>
+              </a:rPr>
+              <a:t>two of the three high risks sit in the handoff from Phase 1 to Phase 2, and the third in how Phase 1 is judged. Collaborator inputs and NSF's Phase 2 decisions retire the first two (the next two slides), and the judging design addresses the third.</a:t>
+            </a:r>
+            <a:endParaRPr lang="en-US" sz="1350" dirty="0"/>
+          </a:p>
+        </p:txBody>
+      </p:sp>
+      <p:sp>
+        <p:nvSpPr>
+          <p:cNvPr id="6" name="Text 3"/>
+          <p:cNvSpPr txBox="1"/>
+          <p:nvPr/>
+        </p:nvSpPr>
+        <p:spPr>
+          <a:xfrm>
+            <a:off x="548640" y="5989320"/>
+            <a:ext cx="11064240" cy="292608"/>
+          </a:xfrm>
+          <a:prstGeom prst="rect">
+            <a:avLst/>
+          </a:prstGeom>
+          <a:noFill/>
+          <a:ln/>
+        </p:spPr>
+        <p:txBody>
+          <a:bodyPr wrap="square" lIns="0" tIns="0" rIns="0" bIns="0" rtlCol="0" anchor="b"/>
+          <a:lstStyle/>
+          <a:p>
+            <a:pPr indent="0" marL="0">
+              <a:buNone/>
+            </a:pPr>
+            <a:r>
+              <a:rPr lang="en-US" sz="950" i="1" dirty="0">
+                <a:solidFill>
+                  <a:schemeClr val="accent5"/>
+                </a:solidFill>
+              </a:rPr>
+              <a:t>Ratings are our working assessment; revisit them at each gate.</a:t>
+            </a:r>
+            <a:endParaRPr lang="en-US" sz="950" dirty="0"/>
+          </a:p>
+        </p:txBody>
+      </p:sp>
+      <p:sp>
+        <p:nvSpPr>
+          <p:cNvPr id="25" name="Slide Number Placeholder 0"/>
+          <p:cNvSpPr>
+            <a:spLocks noGrp="1"/>
+          </p:cNvSpPr>
+          <p:nvPr>
+            <p:ph type="sldNum" sz="quarter" idx="4294967295"/>
+          </p:nvPr>
+        </p:nvSpPr>
+        <p:spPr>
+          <a:xfrm>
+            <a:off x="11064240" y="6382512"/>
+            <a:ext cx="548640" cy="274320"/>
+          </a:xfrm>
+          <a:prstGeom prst="rect">
+            <a:avLst/>
+          </a:prstGeom>
+          <a:extLst>
+            <a:ext uri="{C572A759-6A51-4108-AA02-DFA0A04FC94B}">
+              <ma14:wrappingTextBoxFlag xmlns:ma14="http://schemas.microsoft.com/office/mac/drawingml/2011/main" val="0"/>
+            </a:ext>
+          </a:extLst>
+        </p:spPr>
+        <p:txBody>
+          <a:bodyPr/>
+          <a:lstStyle>
+            <a:lvl1pPr>
+              <a:defRPr sz="1000">
+                <a:solidFill>
+                  <a:schemeClr val="accent5"/>
+                </a:solidFill>
+              </a:defRPr>
+            </a:lvl1pPr>
+          </a:lstStyle>
+          <a:p>
+            <a:pPr algn="r"/>
+            <a:fld id="{F7021451-1387-4CA6-816F-3879F97B5CBC}" type="slidenum">
+              <a:rPr b="0" lang="en-US"/>
+              <a:t>14</a:t>
+            </a:fld>
+            <a:endParaRPr lang="en-US"/>
+          </a:p>
+        </p:txBody>
+      </p:sp>
+    </p:spTree>
+  </p:cSld>
+  <p:clrMapOvr>
+    <a:masterClrMapping/>
+  </p:clrMapOvr>
+</p:sld>
+</file>
+
+<file path=ppt/slides/slide15.xml><?xml version="1.0" encoding="utf-8"?>
+<p:sld xmlns:a="http://schemas.openxmlformats.org/drawingml/2006/main" xmlns:r="http://schemas.openxmlformats.org/officeDocument/2006/relationships" xmlns:p="http://schemas.openxmlformats.org/presentationml/2006/main">
+  <p:cSld name="Slide 15">
+    <p:spTree>
+      <p:nvGrpSpPr>
+        <p:cNvPr id="1" name=""/>
+        <p:cNvGrpSpPr/>
+        <p:nvPr/>
+      </p:nvGrpSpPr>
+      <p:grpSpPr>
+        <a:xfrm>
+          <a:off x="0" y="0"/>
+          <a:ext cx="0" cy="0"/>
+          <a:chOff x="0" y="0"/>
+          <a:chExt cx="0" cy="0"/>
+        </a:xfrm>
+      </p:grpSpPr>
+      <p:sp>
+        <p:nvSpPr>
+          <p:cNvPr id="2" name="Text 0"/>
+          <p:cNvSpPr/>
+          <p:nvPr>
+            <p:ph idx="100" type="title" hasCustomPrompt="1"/>
+          </p:nvPr>
+        </p:nvSpPr>
+        <p:spPr>
+          <a:xfrm>
+            <a:off x="548640" y="320040"/>
+            <a:ext cx="11064240" cy="868680"/>
+          </a:xfrm>
+          <a:prstGeom prst="rect">
+            <a:avLst/>
+          </a:prstGeom>
+          <a:noFill/>
+          <a:ln/>
+        </p:spPr>
+        <p:txBody>
+          <a:bodyPr wrap="square" lIns="0" tIns="0" rIns="0" bIns="0" rtlCol="0" anchor="ctr"/>
+          <a:lstStyle/>
+          <a:p>
+            <a:pPr algn="l" indent="0" marL="0">
+              <a:buNone/>
+            </a:pPr>
+            <a:r>
+              <a:rPr lang="en-US" sz="2800" b="1" dirty="0">
+                <a:solidFill>
+                  <a:schemeClr val="tx2"/>
+                </a:solidFill>
+                <a:latin typeface="Cambria" pitchFamily="34" charset="0"/>
+                <a:ea typeface="Cambria" pitchFamily="34" charset="-122"/>
+                <a:cs typeface="Cambria" pitchFamily="34" charset="-120"/>
+              </a:rPr>
+              <a:t>What we ask of the industry collaborators</a:t>
+            </a:r>
+            <a:endParaRPr lang="en-US" sz="2800" dirty="0"/>
+          </a:p>
+        </p:txBody>
+      </p:sp>
+      <p:graphicFrame>
+        <p:nvGraphicFramePr>
+          <p:cNvPr id="16" name="Table 0"/>
           <p:cNvGraphicFramePr>
             <a:graphicFrameLocks noGrp="1"/>
           </p:cNvGraphicFramePr>
@@ -6715,7 +11224,7 @@
             <a:pPr algn="r"/>
             <a:fld id="{F7021451-1387-4CA6-816F-3879F97B5CBC}" type="slidenum">
               <a:rPr b="0" lang="en-US"/>
-              <a:t>13</a:t>
+              <a:t>15</a:t>
             </a:fld>
             <a:endParaRPr lang="en-US"/>
           </a:p>
@@ -6729,9 +11238,9 @@
 </p:sld>
 </file>
 
-<file path=ppt/slides/slide14.xml><?xml version="1.0" encoding="utf-8"?>
+<file path=ppt/slides/slide16.xml><?xml version="1.0" encoding="utf-8"?>
 <p:sld xmlns:a="http://schemas.openxmlformats.org/drawingml/2006/main" xmlns:r="http://schemas.openxmlformats.org/officeDocument/2006/relationships" xmlns:p="http://schemas.openxmlformats.org/presentationml/2006/main">
-  <p:cSld name="Slide 14">
+  <p:cSld name="Slide 16">
     <p:spTree>
       <p:nvGrpSpPr>
         <p:cNvPr id="1" name=""/>
@@ -6789,7 +11298,7 @@
       </p:sp>
       <p:graphicFrame>
         <p:nvGraphicFramePr>
-          <p:cNvPr id="15" name="Table 0"/>
+          <p:cNvPr id="17" name="Table 0"/>
           <p:cNvGraphicFramePr>
             <a:graphicFrameLocks noGrp="1"/>
           </p:cNvGraphicFramePr>
@@ -8188,7 +12697,7 @@
             <a:pPr algn="r"/>
             <a:fld id="{F7021451-1387-4CA6-816F-3879F97B5CBC}" type="slidenum">
               <a:rPr b="0" lang="en-US"/>
-              <a:t>14</a:t>
+              <a:t>16</a:t>
             </a:fld>
             <a:endParaRPr lang="en-US"/>
           </a:p>
@@ -8202,9 +12711,9 @@
 </p:sld>
 </file>
 
-<file path=ppt/slides/slide15.xml><?xml version="1.0" encoding="utf-8"?>
+<file path=ppt/slides/slide17.xml><?xml version="1.0" encoding="utf-8"?>
 <p:sld xmlns:a="http://schemas.openxmlformats.org/drawingml/2006/main" xmlns:r="http://schemas.openxmlformats.org/officeDocument/2006/relationships" xmlns:p="http://schemas.openxmlformats.org/presentationml/2006/main">
-  <p:cSld name="Slide 15">
+  <p:cSld name="Slide 17">
     <p:spTree>
       <p:nvGrpSpPr>
         <p:cNvPr id="1" name=""/>
@@ -9300,7 +13809,7 @@
             <a:pPr algn="r"/>
             <a:fld id="{F7021451-1387-4CA6-816F-3879F97B5CBC}" type="slidenum">
               <a:rPr b="0" lang="en-US"/>
-              <a:t>15</a:t>
+              <a:t>17</a:t>
             </a:fld>
             <a:endParaRPr lang="en-US"/>
           </a:p>
@@ -9314,9 +13823,9 @@
 </p:sld>
 </file>
 
-<file path=ppt/slides/slide16.xml><?xml version="1.0" encoding="utf-8"?>
+<file path=ppt/slides/slide18.xml><?xml version="1.0" encoding="utf-8"?>
 <p:sld xmlns:a="http://schemas.openxmlformats.org/drawingml/2006/main" xmlns:r="http://schemas.openxmlformats.org/officeDocument/2006/relationships" xmlns:p="http://schemas.openxmlformats.org/presentationml/2006/main">
-  <p:cSld name="Slide 16">
+  <p:cSld name="Slide 18">
     <p:spTree>
       <p:nvGrpSpPr>
         <p:cNvPr id="1" name=""/>
@@ -9595,7 +14104,7 @@
             <a:pPr algn="r"/>
             <a:fld id="{F7021451-1387-4CA6-816F-3879F97B5CBC}" type="slidenum">
               <a:rPr b="0" lang="en-US"/>
-              <a:t>16</a:t>
+              <a:t>18</a:t>
             </a:fld>
             <a:endParaRPr lang="en-US"/>
           </a:p>
